--- a/NEXUS_OS_Project_Presentation.pptx
+++ b/NEXUS_OS_Project_Presentation.pptx
@@ -3148,8 +3148,8 @@
         </p:nvSpPr>
         <p:spPr>
           <a:xfrm>
-            <a:off x="731520" y="1371600"/>
-            <a:ext cx="109728" cy="2926080"/>
+            <a:off x="914400" y="1463040"/>
+            <a:ext cx="109728" cy="3291840"/>
           </a:xfrm>
           <a:prstGeom prst="roundRect">
             <a:avLst/>
@@ -3191,8 +3191,8 @@
         </p:nvSpPr>
         <p:spPr>
           <a:xfrm>
-            <a:off x="1097280" y="1280160"/>
-            <a:ext cx="10332720" cy="4114800"/>
+            <a:off x="1280160" y="1371600"/>
+            <a:ext cx="9875520" cy="4114800"/>
           </a:xfrm>
           <a:prstGeom prst="rect">
             <a:avLst/>
@@ -3206,20 +3206,23 @@
           <a:lstStyle/>
           <a:p>
             <a:pPr>
-              <a:defRPr sz="1200" b="1">
+              <a:spcAft>
+                <a:spcPts val="1000"/>
+              </a:spcAft>
+              <a:defRPr sz="1300" b="1">
                 <a:solidFill>
                   <a:srgbClr val="38BDF8"/>
                 </a:solidFill>
               </a:defRPr>
             </a:pPr>
             <a:r>
-              <a:t>OPERATING SYSTEMS &amp; DISTRIBUTED SYSTEMS (OSDS) CAPSTONE PROJECT</a:t>
+              <a:t>OPERATING SYSTEMS &amp; DISTRIBUTED SYSTEMS CAPSTONE PROJECT</a:t>
             </a:r>
           </a:p>
           <a:p>
             <a:pPr>
               <a:spcAft>
-                <a:spcPts val="400"/>
+                <a:spcPts val="600"/>
               </a:spcAft>
               <a:defRPr sz="4400" b="1">
                 <a:solidFill>
@@ -3234,151 +3237,76 @@
           <a:p>
             <a:pPr>
               <a:spcAft>
-                <a:spcPts val="2000"/>
+                <a:spcPts val="2200"/>
               </a:spcAft>
               <a:defRPr sz="2000">
                 <a:solidFill>
-                  <a:srgbClr val="CBD5E1"/>
+                  <a:srgbClr val="22C55E"/>
                 </a:solidFill>
               </a:defRPr>
             </a:pPr>
             <a:r>
-              <a:t>An Educational Distributed Operating System for a Campus Lab Cluster</a:t>
-            </a:r>
-          </a:p>
-          <a:p>
-            <a:pPr>
-              <a:defRPr sz="1300">
-                <a:solidFill>
-                  <a:srgbClr val="94A3B8"/>
-                </a:solidFill>
-              </a:defRPr>
-            </a:pPr>
-            <a:r>
-              <a:t>Academic Review &amp; Project Evaluation | Third-Year Computer Engineering</a:t>
-            </a:r>
-          </a:p>
-        </p:txBody>
-      </p:sp>
-      <p:sp>
-        <p:nvSpPr>
-          <p:cNvPr id="5" name="Rounded Rectangle 4"/>
-          <p:cNvSpPr/>
-          <p:nvPr/>
-        </p:nvSpPr>
-        <p:spPr>
-          <a:xfrm>
-            <a:off x="731520" y="4754880"/>
-            <a:ext cx="10728655" cy="1371600"/>
-          </a:xfrm>
-          <a:prstGeom prst="roundRect">
-            <a:avLst/>
-          </a:prstGeom>
-          <a:solidFill>
-            <a:srgbClr val="162038"/>
-          </a:solidFill>
-          <a:ln w="19050">
-            <a:solidFill>
-              <a:srgbClr val="263554"/>
-            </a:solidFill>
-          </a:ln>
-        </p:spPr>
-        <p:style>
-          <a:lnRef idx="1">
-            <a:schemeClr val="accent1"/>
-          </a:lnRef>
-          <a:fillRef idx="3">
-            <a:schemeClr val="accent1"/>
-          </a:fillRef>
-          <a:effectRef idx="2">
-            <a:schemeClr val="accent1"/>
-          </a:effectRef>
-          <a:fontRef idx="minor">
-            <a:schemeClr val="lt1"/>
-          </a:fontRef>
-        </p:style>
-        <p:txBody>
-          <a:bodyPr rtlCol="0" anchor="ctr"/>
-          <a:lstStyle/>
-          <a:p>
-            <a:pPr algn="ctr"/>
-          </a:p>
-        </p:txBody>
-      </p:sp>
-      <p:sp>
-        <p:nvSpPr>
-          <p:cNvPr id="6" name="TextBox 5"/>
-          <p:cNvSpPr txBox="1"/>
-          <p:nvPr/>
-        </p:nvSpPr>
-        <p:spPr>
-          <a:xfrm>
-            <a:off x="960120" y="4937760"/>
-            <a:ext cx="10271455" cy="411480"/>
-          </a:xfrm>
-          <a:prstGeom prst="rect">
-            <a:avLst/>
-          </a:prstGeom>
-          <a:noFill/>
-        </p:spPr>
-        <p:txBody>
-          <a:bodyPr wrap="square" lIns="0" tIns="0" rIns="0" bIns="0">
-            <a:spAutoFit/>
-          </a:bodyPr>
-          <a:lstStyle/>
-          <a:p>
-            <a:pPr>
-              <a:defRPr sz="1400" b="1">
-                <a:solidFill>
-                  <a:srgbClr val="38BDF8"/>
-                </a:solidFill>
-              </a:defRPr>
-            </a:pPr>
-            <a:r>
-              <a:t>Architecture &amp; Implementation Scope</a:t>
-            </a:r>
-          </a:p>
-        </p:txBody>
-      </p:sp>
-      <p:sp>
-        <p:nvSpPr>
-          <p:cNvPr id="7" name="TextBox 6"/>
-          <p:cNvSpPr txBox="1"/>
-          <p:nvPr/>
-        </p:nvSpPr>
-        <p:spPr>
-          <a:xfrm>
-            <a:off x="960120" y="5257800"/>
-            <a:ext cx="10241280" cy="731520"/>
-          </a:xfrm>
-          <a:prstGeom prst="rect">
-            <a:avLst/>
-          </a:prstGeom>
-          <a:noFill/>
-        </p:spPr>
-        <p:txBody>
-          <a:bodyPr wrap="square" lIns="0" tIns="0">
-            <a:spAutoFit/>
-          </a:bodyPr>
-          <a:lstStyle/>
-          <a:p>
-            <a:pPr>
-              <a:defRPr sz="1200">
-                <a:solidFill>
-                  <a:srgbClr val="CBD5E1"/>
-                </a:solidFill>
-              </a:defRPr>
-            </a:pPr>
-            <a:r>
-              <a:t>• Centralized Coordinator Control Plane (:9000) &amp; 3 Worker Workstations (:9001, :9002, :9003)</a:t>
-            </a:r>
-            <a:br/>
-            <a:r>
-              <a:t>• Mini Slurm (CPU Scheduling) + Mini HDFS (Block Storage) + Mini Dropbox (Collaborative Vector Sync)</a:t>
-            </a:r>
-            <a:br/>
-            <a:r>
-              <a:t>• 76/76 Unit Tests Passed · Production Web Control Center (:8080) · Live Cloud Deployment on Render</a:t>
+              <a:t>An Educational Distributed Operating System for Campus Lab Clusters</a:t>
+            </a:r>
+          </a:p>
+          <a:p>
+            <a:pPr>
+              <a:spcAft>
+                <a:spcPts val="800"/>
+              </a:spcAft>
+            </a:pPr>
+            <a:r>
+              <a:rPr sz="1500">
+                <a:solidFill>
+                  <a:srgbClr val="E2E8F0"/>
+                </a:solidFill>
+              </a:rPr>
+              <a:t>•  Aggregates idle campus computers into a unified, high-throughput compute cluster</a:t>
+            </a:r>
+          </a:p>
+          <a:p>
+            <a:pPr>
+              <a:spcAft>
+                <a:spcPts val="800"/>
+              </a:spcAft>
+            </a:pPr>
+            <a:r>
+              <a:rPr sz="1500">
+                <a:solidFill>
+                  <a:srgbClr val="E2E8F0"/>
+                </a:solidFill>
+              </a:rPr>
+              <a:t>•  Implements kernel scheduling, deadlock handling, virtual paging, and distributed DFS from scratch</a:t>
+            </a:r>
+          </a:p>
+          <a:p>
+            <a:pPr>
+              <a:spcAft>
+                <a:spcPts val="800"/>
+              </a:spcAft>
+            </a:pPr>
+            <a:r>
+              <a:rPr sz="1500">
+                <a:solidFill>
+                  <a:srgbClr val="E2E8F0"/>
+                </a:solidFill>
+              </a:rPr>
+              <a:t>•  Provides real-time web telemetry for live cluster monitoring and algorithm inspection</a:t>
+            </a:r>
+          </a:p>
+          <a:p>
+            <a:pPr>
+              <a:spcAft>
+                <a:spcPts val="800"/>
+              </a:spcAft>
+            </a:pPr>
+            <a:r>
+              <a:rPr sz="1500">
+                <a:solidFill>
+                  <a:srgbClr val="E2E8F0"/>
+                </a:solidFill>
+              </a:rPr>
+              <a:t>•  Developed and presented by Four-Member Engineering Team | Department of Computer Science &amp; Engineering</a:t>
             </a:r>
           </a:p>
         </p:txBody>
@@ -3446,23 +3374,95 @@
       </p:sp>
       <p:sp>
         <p:nvSpPr>
-          <p:cNvPr id="3" name="Rounded Rectangle 2"/>
+          <p:cNvPr id="3" name="TextBox 2"/>
+          <p:cNvSpPr txBox="1"/>
+          <p:nvPr/>
+        </p:nvSpPr>
+        <p:spPr>
+          <a:xfrm>
+            <a:off x="822960" y="365760"/>
+            <a:ext cx="10515600" cy="292608"/>
+          </a:xfrm>
+          <a:prstGeom prst="rect">
+            <a:avLst/>
+          </a:prstGeom>
+          <a:noFill/>
+        </p:spPr>
+        <p:txBody>
+          <a:bodyPr wrap="square" lIns="0" tIns="0" rIns="0" bIns="0">
+            <a:spAutoFit/>
+          </a:bodyPr>
+          <a:lstStyle/>
+          <a:p>
+            <a:pPr>
+              <a:defRPr sz="1100" b="1">
+                <a:solidFill>
+                  <a:srgbClr val="38BDF8"/>
+                </a:solidFill>
+              </a:defRPr>
+            </a:pPr>
+            <a:r>
+              <a:t>PROJECT EVALUATION &amp; SUMMARY</a:t>
+            </a:r>
+          </a:p>
+        </p:txBody>
+      </p:sp>
+      <p:sp>
+        <p:nvSpPr>
+          <p:cNvPr id="4" name="TextBox 3"/>
+          <p:cNvSpPr txBox="1"/>
+          <p:nvPr/>
+        </p:nvSpPr>
+        <p:spPr>
+          <a:xfrm>
+            <a:off x="822960" y="658368"/>
+            <a:ext cx="10515600" cy="502920"/>
+          </a:xfrm>
+          <a:prstGeom prst="rect">
+            <a:avLst/>
+          </a:prstGeom>
+          <a:noFill/>
+        </p:spPr>
+        <p:txBody>
+          <a:bodyPr wrap="square" lIns="0" tIns="0" rIns="0" bIns="0">
+            <a:spAutoFit/>
+          </a:bodyPr>
+          <a:lstStyle/>
+          <a:p>
+            <a:pPr>
+              <a:defRPr sz="2200" b="1">
+                <a:solidFill>
+                  <a:srgbClr val="FFFFFF"/>
+                </a:solidFill>
+              </a:defRPr>
+            </a:pPr>
+            <a:r>
+              <a:t>Engineering Deliverables &amp; Conclusion</a:t>
+            </a:r>
+          </a:p>
+        </p:txBody>
+      </p:sp>
+      <p:sp>
+        <p:nvSpPr>
+          <p:cNvPr id="5" name="Rounded Rectangle 4"/>
           <p:cNvSpPr/>
           <p:nvPr/>
         </p:nvSpPr>
         <p:spPr>
           <a:xfrm>
-            <a:off x="731520" y="1371600"/>
-            <a:ext cx="109728" cy="2286000"/>
+            <a:off x="822960" y="1280160"/>
+            <a:ext cx="10545775" cy="4983480"/>
           </a:xfrm>
           <a:prstGeom prst="roundRect">
             <a:avLst/>
           </a:prstGeom>
           <a:solidFill>
-            <a:srgbClr val="22C55E"/>
+            <a:srgbClr val="141E34"/>
           </a:solidFill>
-          <a:ln>
-            <a:noFill/>
+          <a:ln w="19050">
+            <a:solidFill>
+              <a:srgbClr val="263758"/>
+            </a:solidFill>
           </a:ln>
         </p:spPr>
         <p:style>
@@ -3489,14 +3489,14 @@
       </p:sp>
       <p:sp>
         <p:nvSpPr>
-          <p:cNvPr id="4" name="TextBox 3"/>
+          <p:cNvPr id="6" name="TextBox 5"/>
           <p:cNvSpPr txBox="1"/>
           <p:nvPr/>
         </p:nvSpPr>
         <p:spPr>
           <a:xfrm>
-            <a:off x="1097280" y="1280160"/>
-            <a:ext cx="10332720" cy="2743200"/>
+            <a:off x="1188720" y="1554480"/>
+            <a:ext cx="9814255" cy="365760"/>
           </a:xfrm>
           <a:prstGeom prst="rect">
             <a:avLst/>
@@ -3504,71 +3504,159 @@
           <a:noFill/>
         </p:spPr>
         <p:txBody>
-          <a:bodyPr wrap="square">
+          <a:bodyPr wrap="square" lIns="0" tIns="0" rIns="0" bIns="0">
             <a:spAutoFit/>
           </a:bodyPr>
           <a:lstStyle/>
           <a:p>
             <a:pPr>
-              <a:defRPr sz="1200" b="1">
+              <a:defRPr sz="1300" b="1">
                 <a:solidFill>
                   <a:srgbClr val="22C55E"/>
                 </a:solidFill>
               </a:defRPr>
             </a:pPr>
             <a:r>
-              <a:t>SUMMARY OF ACHIEVEMENTS &amp; CONTRIBUTIONS</a:t>
-            </a:r>
-          </a:p>
+              <a:t>Summary of Capstone Achievements | NEXUS-OS Distributed Cluster</a:t>
+            </a:r>
+          </a:p>
+        </p:txBody>
+      </p:sp>
+      <p:sp>
+        <p:nvSpPr>
+          <p:cNvPr id="7" name="TextBox 6"/>
+          <p:cNvSpPr txBox="1"/>
+          <p:nvPr/>
+        </p:nvSpPr>
+        <p:spPr>
+          <a:xfrm>
+            <a:off x="1188720" y="2057400"/>
+            <a:ext cx="9814255" cy="2651760"/>
+          </a:xfrm>
+          <a:prstGeom prst="rect">
+            <a:avLst/>
+          </a:prstGeom>
+          <a:noFill/>
+        </p:spPr>
+        <p:txBody>
+          <a:bodyPr wrap="square" lIns="0" tIns="0" rIns="0" bIns="0">
+            <a:spAutoFit/>
+          </a:bodyPr>
+          <a:lstStyle/>
           <a:p>
             <a:pPr>
               <a:spcAft>
-                <a:spcPts val="400"/>
+                <a:spcPts val="1200"/>
               </a:spcAft>
-              <a:defRPr sz="4000" b="1">
-                <a:solidFill>
-                  <a:srgbClr val="FFFFFF"/>
-                </a:solidFill>
-              </a:defRPr>
-            </a:pPr>
-            <a:r>
-              <a:t>Thank You!</a:t>
-            </a:r>
-          </a:p>
-          <a:p>
-            <a:pPr>
-              <a:defRPr sz="1800">
-                <a:solidFill>
-                  <a:srgbClr val="CBD5E1"/>
-                </a:solidFill>
-              </a:defRPr>
-            </a:pPr>
-            <a:r>
-              <a:t>Questions &amp; Answers | Demonstrations Available</a:t>
-            </a:r>
-          </a:p>
-        </p:txBody>
-      </p:sp>
-      <p:sp>
-        <p:nvSpPr>
-          <p:cNvPr id="5" name="Rounded Rectangle 4"/>
+            </a:pPr>
+            <a:r>
+              <a:rPr b="1" sz="1600">
+                <a:solidFill>
+                  <a:srgbClr val="38BDF8"/>
+                </a:solidFill>
+              </a:rPr>
+              <a:t>•  Full-Stack Distributed OS: </a:t>
+            </a:r>
+            <a:r>
+              <a:rPr b="0" sz="1600">
+                <a:solidFill>
+                  <a:srgbClr val="E2E8F0"/>
+                </a:solidFill>
+              </a:rPr>
+              <a:t>Successfully designed, coded, and deployed a working 4-node cluster (1 Coordinator + 3 Workers) with a live web dashboard.</a:t>
+            </a:r>
+          </a:p>
+          <a:p>
+            <a:pPr>
+              <a:spcAft>
+                <a:spcPts val="1200"/>
+              </a:spcAft>
+            </a:pPr>
+            <a:r>
+              <a:rPr b="1" sz="1600">
+                <a:solidFill>
+                  <a:srgbClr val="38BDF8"/>
+                </a:solidFill>
+              </a:rPr>
+              <a:t>•  10 OSDS Modules Implemented: </a:t>
+            </a:r>
+            <a:r>
+              <a:rPr b="0" sz="1600">
+                <a:solidFill>
+                  <a:srgbClr val="E2E8F0"/>
+                </a:solidFill>
+              </a:rPr>
+              <a:t>Integrated process scheduling, deadlock avoidance, WFG recovery, virtual memory paging, Ricart-Agrawala, and replicated DFS into one unified system.</a:t>
+            </a:r>
+          </a:p>
+          <a:p>
+            <a:pPr>
+              <a:spcAft>
+                <a:spcPts val="1200"/>
+              </a:spcAft>
+            </a:pPr>
+            <a:r>
+              <a:rPr b="1" sz="1600">
+                <a:solidFill>
+                  <a:srgbClr val="38BDF8"/>
+                </a:solidFill>
+              </a:rPr>
+              <a:t>•  Real Algorithms, Zero Mock Data: </a:t>
+            </a:r>
+            <a:r>
+              <a:rPr b="0" sz="1600">
+                <a:solidFill>
+                  <a:srgbClr val="E2E8F0"/>
+                </a:solidFill>
+              </a:rPr>
+              <a:t>Every metric, state transition, and heartbeat reflects genuine algorithmic execution across our backend APIs.</a:t>
+            </a:r>
+          </a:p>
+          <a:p>
+            <a:pPr>
+              <a:spcAft>
+                <a:spcPts val="1200"/>
+              </a:spcAft>
+            </a:pPr>
+            <a:r>
+              <a:rPr b="1" sz="1600">
+                <a:solidFill>
+                  <a:srgbClr val="38BDF8"/>
+                </a:solidFill>
+              </a:rPr>
+              <a:t>•  Resilience &amp; Verification: </a:t>
+            </a:r>
+            <a:r>
+              <a:rPr b="0" sz="1600">
+                <a:solidFill>
+                  <a:srgbClr val="E2E8F0"/>
+                </a:solidFill>
+              </a:rPr>
+              <a:t>Proven reliability under simulated node crashes, in-flight task migration, and heavy burst scheduling workloads.</a:t>
+            </a:r>
+          </a:p>
+        </p:txBody>
+      </p:sp>
+      <p:sp>
+        <p:nvSpPr>
+          <p:cNvPr id="8" name="Rounded Rectangle 7"/>
           <p:cNvSpPr/>
           <p:nvPr/>
         </p:nvSpPr>
         <p:spPr>
           <a:xfrm>
-            <a:off x="731520" y="3931920"/>
-            <a:ext cx="3474720" cy="2377440"/>
+            <a:off x="1188720" y="4892040"/>
+            <a:ext cx="9814255" cy="1051560"/>
           </a:xfrm>
           <a:prstGeom prst="roundRect">
             <a:avLst/>
           </a:prstGeom>
           <a:solidFill>
-            <a:srgbClr val="162038"/>
+            <a:srgbClr val="0F172A"/>
           </a:solidFill>
           <a:ln w="19050">
             <a:solidFill>
-              <a:srgbClr val="263554"/>
+              <a:srgbClr val="38BDF8"/>
             </a:solidFill>
           </a:ln>
         </p:spPr>
@@ -3587,309 +3675,30 @@
           </a:fontRef>
         </p:style>
         <p:txBody>
-          <a:bodyPr rtlCol="0" anchor="ctr"/>
-          <a:lstStyle/>
-          <a:p>
-            <a:pPr algn="ctr"/>
-          </a:p>
-        </p:txBody>
-      </p:sp>
-      <p:sp>
-        <p:nvSpPr>
-          <p:cNvPr id="6" name="TextBox 5"/>
-          <p:cNvSpPr txBox="1"/>
-          <p:nvPr/>
-        </p:nvSpPr>
-        <p:spPr>
-          <a:xfrm>
-            <a:off x="960120" y="4114800"/>
-            <a:ext cx="3017520" cy="411480"/>
-          </a:xfrm>
-          <a:prstGeom prst="rect">
-            <a:avLst/>
-          </a:prstGeom>
-          <a:noFill/>
-        </p:spPr>
-        <p:txBody>
-          <a:bodyPr wrap="square" lIns="0" tIns="0" rIns="0" bIns="0">
-            <a:spAutoFit/>
-          </a:bodyPr>
-          <a:lstStyle/>
-          <a:p>
-            <a:pPr>
-              <a:defRPr sz="1400" b="1">
+          <a:bodyPr rtlCol="0" anchor="ctr" wrap="square"/>
+          <a:lstStyle/>
+          <a:p>
+            <a:pPr algn="ctr">
+              <a:defRPr sz="2200" b="1">
+                <a:solidFill>
+                  <a:srgbClr val="FFFFFF"/>
+                </a:solidFill>
+              </a:defRPr>
+            </a:pPr>
+            <a:r>
+              <a:t>Thank You!</a:t>
+            </a:r>
+          </a:p>
+          <a:p>
+            <a:pPr algn="ctr">
+              <a:defRPr sz="1400">
                 <a:solidFill>
                   <a:srgbClr val="38BDF8"/>
                 </a:solidFill>
               </a:defRPr>
             </a:pPr>
             <a:r>
-              <a:t>Comprehensive OSDS Integration</a:t>
-            </a:r>
-          </a:p>
-        </p:txBody>
-      </p:sp>
-      <p:sp>
-        <p:nvSpPr>
-          <p:cNvPr id="7" name="TextBox 6"/>
-          <p:cNvSpPr txBox="1"/>
-          <p:nvPr/>
-        </p:nvSpPr>
-        <p:spPr>
-          <a:xfrm>
-            <a:off x="914400" y="4480560"/>
-            <a:ext cx="3108960" cy="1645920"/>
-          </a:xfrm>
-          <a:prstGeom prst="rect">
-            <a:avLst/>
-          </a:prstGeom>
-          <a:noFill/>
-        </p:spPr>
-        <p:txBody>
-          <a:bodyPr wrap="square" lIns="0" tIns="0">
-            <a:spAutoFit/>
-          </a:bodyPr>
-          <a:lstStyle/>
-          <a:p>
-            <a:pPr>
-              <a:defRPr sz="1100">
-                <a:solidFill>
-                  <a:srgbClr val="94A3B8"/>
-                </a:solidFill>
-              </a:defRPr>
-            </a:pPr>
-            <a:r>
-              <a:t>Bridges classical single-host OS algorithms (Banker's, Belady's, Gantt scheduling) with modern distributed systems (Ricart-Agrawala, DFS replication, Vector Clocks).</a:t>
-            </a:r>
-          </a:p>
-        </p:txBody>
-      </p:sp>
-      <p:sp>
-        <p:nvSpPr>
-          <p:cNvPr id="8" name="Rounded Rectangle 7"/>
-          <p:cNvSpPr/>
-          <p:nvPr/>
-        </p:nvSpPr>
-        <p:spPr>
-          <a:xfrm>
-            <a:off x="4343400" y="3931920"/>
-            <a:ext cx="3474720" cy="2377440"/>
-          </a:xfrm>
-          <a:prstGeom prst="roundRect">
-            <a:avLst/>
-          </a:prstGeom>
-          <a:solidFill>
-            <a:srgbClr val="162038"/>
-          </a:solidFill>
-          <a:ln w="19050">
-            <a:solidFill>
-              <a:srgbClr val="263554"/>
-            </a:solidFill>
-          </a:ln>
-        </p:spPr>
-        <p:style>
-          <a:lnRef idx="1">
-            <a:schemeClr val="accent1"/>
-          </a:lnRef>
-          <a:fillRef idx="3">
-            <a:schemeClr val="accent1"/>
-          </a:fillRef>
-          <a:effectRef idx="2">
-            <a:schemeClr val="accent1"/>
-          </a:effectRef>
-          <a:fontRef idx="minor">
-            <a:schemeClr val="lt1"/>
-          </a:fontRef>
-        </p:style>
-        <p:txBody>
-          <a:bodyPr rtlCol="0" anchor="ctr"/>
-          <a:lstStyle/>
-          <a:p>
-            <a:pPr algn="ctr"/>
-          </a:p>
-        </p:txBody>
-      </p:sp>
-      <p:sp>
-        <p:nvSpPr>
-          <p:cNvPr id="9" name="TextBox 8"/>
-          <p:cNvSpPr txBox="1"/>
-          <p:nvPr/>
-        </p:nvSpPr>
-        <p:spPr>
-          <a:xfrm>
-            <a:off x="4572000" y="4114800"/>
-            <a:ext cx="3017520" cy="411480"/>
-          </a:xfrm>
-          <a:prstGeom prst="rect">
-            <a:avLst/>
-          </a:prstGeom>
-          <a:noFill/>
-        </p:spPr>
-        <p:txBody>
-          <a:bodyPr wrap="square" lIns="0" tIns="0" rIns="0" bIns="0">
-            <a:spAutoFit/>
-          </a:bodyPr>
-          <a:lstStyle/>
-          <a:p>
-            <a:pPr>
-              <a:defRPr sz="1400" b="1">
-                <a:solidFill>
-                  <a:srgbClr val="22C55E"/>
-                </a:solidFill>
-              </a:defRPr>
-            </a:pPr>
-            <a:r>
-              <a:t>Engineering Rigor &amp; Verification</a:t>
-            </a:r>
-          </a:p>
-        </p:txBody>
-      </p:sp>
-      <p:sp>
-        <p:nvSpPr>
-          <p:cNvPr id="10" name="TextBox 9"/>
-          <p:cNvSpPr txBox="1"/>
-          <p:nvPr/>
-        </p:nvSpPr>
-        <p:spPr>
-          <a:xfrm>
-            <a:off x="4526280" y="4480560"/>
-            <a:ext cx="3108960" cy="1645920"/>
-          </a:xfrm>
-          <a:prstGeom prst="rect">
-            <a:avLst/>
-          </a:prstGeom>
-          <a:noFill/>
-        </p:spPr>
-        <p:txBody>
-          <a:bodyPr wrap="square" lIns="0" tIns="0">
-            <a:spAutoFit/>
-          </a:bodyPr>
-          <a:lstStyle/>
-          <a:p>
-            <a:pPr>
-              <a:defRPr sz="1100">
-                <a:solidFill>
-                  <a:srgbClr val="94A3B8"/>
-                </a:solidFill>
-              </a:defRPr>
-            </a:pPr>
-            <a:r>
-              <a:t>76/76 unit &amp; integration tests passing · Complete 8-scene automated walkthrough (`demo/lab_day.py`) · Micro-benchmarks for IPC and RPC transports.</a:t>
-            </a:r>
-          </a:p>
-        </p:txBody>
-      </p:sp>
-      <p:sp>
-        <p:nvSpPr>
-          <p:cNvPr id="11" name="Rounded Rectangle 10"/>
-          <p:cNvSpPr/>
-          <p:nvPr/>
-        </p:nvSpPr>
-        <p:spPr>
-          <a:xfrm>
-            <a:off x="7955279" y="3931920"/>
-            <a:ext cx="3474720" cy="2377440"/>
-          </a:xfrm>
-          <a:prstGeom prst="roundRect">
-            <a:avLst/>
-          </a:prstGeom>
-          <a:solidFill>
-            <a:srgbClr val="162038"/>
-          </a:solidFill>
-          <a:ln w="19050">
-            <a:solidFill>
-              <a:srgbClr val="263554"/>
-            </a:solidFill>
-          </a:ln>
-        </p:spPr>
-        <p:style>
-          <a:lnRef idx="1">
-            <a:schemeClr val="accent1"/>
-          </a:lnRef>
-          <a:fillRef idx="3">
-            <a:schemeClr val="accent1"/>
-          </a:fillRef>
-          <a:effectRef idx="2">
-            <a:schemeClr val="accent1"/>
-          </a:effectRef>
-          <a:fontRef idx="minor">
-            <a:schemeClr val="lt1"/>
-          </a:fontRef>
-        </p:style>
-        <p:txBody>
-          <a:bodyPr rtlCol="0" anchor="ctr"/>
-          <a:lstStyle/>
-          <a:p>
-            <a:pPr algn="ctr"/>
-          </a:p>
-        </p:txBody>
-      </p:sp>
-      <p:sp>
-        <p:nvSpPr>
-          <p:cNvPr id="12" name="TextBox 11"/>
-          <p:cNvSpPr txBox="1"/>
-          <p:nvPr/>
-        </p:nvSpPr>
-        <p:spPr>
-          <a:xfrm>
-            <a:off x="8183879" y="4114800"/>
-            <a:ext cx="3017520" cy="411480"/>
-          </a:xfrm>
-          <a:prstGeom prst="rect">
-            <a:avLst/>
-          </a:prstGeom>
-          <a:noFill/>
-        </p:spPr>
-        <p:txBody>
-          <a:bodyPr wrap="square" lIns="0" tIns="0" rIns="0" bIns="0">
-            <a:spAutoFit/>
-          </a:bodyPr>
-          <a:lstStyle/>
-          <a:p>
-            <a:pPr>
-              <a:defRPr sz="1400" b="1">
-                <a:solidFill>
-                  <a:srgbClr val="FBBF24"/>
-                </a:solidFill>
-              </a:defRPr>
-            </a:pPr>
-            <a:r>
-              <a:t>Production Lab Readiness</a:t>
-            </a:r>
-          </a:p>
-        </p:txBody>
-      </p:sp>
-      <p:sp>
-        <p:nvSpPr>
-          <p:cNvPr id="13" name="TextBox 12"/>
-          <p:cNvSpPr txBox="1"/>
-          <p:nvPr/>
-        </p:nvSpPr>
-        <p:spPr>
-          <a:xfrm>
-            <a:off x="8138159" y="4480560"/>
-            <a:ext cx="3108960" cy="1645920"/>
-          </a:xfrm>
-          <a:prstGeom prst="rect">
-            <a:avLst/>
-          </a:prstGeom>
-          <a:noFill/>
-        </p:spPr>
-        <p:txBody>
-          <a:bodyPr wrap="square" lIns="0" tIns="0">
-            <a:spAutoFit/>
-          </a:bodyPr>
-          <a:lstStyle/>
-          <a:p>
-            <a:pPr>
-              <a:defRPr sz="1100">
-                <a:solidFill>
-                  <a:srgbClr val="94A3B8"/>
-                </a:solidFill>
-              </a:defRPr>
-            </a:pPr>
-            <a:r>
-              <a:t>Single-command master launcher (`python app.py`) across local workstations, cloud deployment on Render, and dark-theme real-time control center.</a:t>
+              <a:t>We welcome your questions and evaluation discussion.</a:t>
             </a:r>
           </a:p>
         </p:txBody>
@@ -3963,8 +3772,8 @@
         </p:nvSpPr>
         <p:spPr>
           <a:xfrm>
-            <a:off x="731520" y="365760"/>
-            <a:ext cx="10728655" cy="320040"/>
+            <a:off x="822960" y="365760"/>
+            <a:ext cx="10515600" cy="292608"/>
           </a:xfrm>
           <a:prstGeom prst="rect">
             <a:avLst/>
@@ -3978,14 +3787,14 @@
           <a:lstStyle/>
           <a:p>
             <a:pPr>
-              <a:defRPr sz="1000" b="1">
+              <a:defRPr sz="1100" b="1">
                 <a:solidFill>
                   <a:srgbClr val="38BDF8"/>
                 </a:solidFill>
               </a:defRPr>
             </a:pPr>
             <a:r>
-              <a:t>SYSTEM ARCHITECTURE &amp; MOTIVATION</a:t>
+              <a:t>PROJECT MOTIVATION &amp; PROBLEM STATEMENT</a:t>
             </a:r>
           </a:p>
         </p:txBody>
@@ -3998,8 +3807,8 @@
         </p:nvSpPr>
         <p:spPr>
           <a:xfrm>
-            <a:off x="731520" y="685800"/>
-            <a:ext cx="10728655" cy="594360"/>
+            <a:off x="822960" y="658368"/>
+            <a:ext cx="10515600" cy="502920"/>
           </a:xfrm>
           <a:prstGeom prst="rect">
             <a:avLst/>
@@ -4020,7 +3829,7 @@
               </a:defRPr>
             </a:pPr>
             <a:r>
-              <a:t>1. Problem Statement &amp; Campus Lab Cluster Architecture</a:t>
+              <a:t>Transforming Idle Campus Hardware into a Cluster</a:t>
             </a:r>
           </a:p>
         </p:txBody>
@@ -4033,18 +3842,18 @@
         </p:nvSpPr>
         <p:spPr>
           <a:xfrm>
-            <a:off x="731520" y="1463040"/>
-            <a:ext cx="5120640" cy="4754880"/>
+            <a:off x="822960" y="1280160"/>
+            <a:ext cx="10545775" cy="4983480"/>
           </a:xfrm>
           <a:prstGeom prst="roundRect">
             <a:avLst/>
           </a:prstGeom>
           <a:solidFill>
-            <a:srgbClr val="162038"/>
+            <a:srgbClr val="141E34"/>
           </a:solidFill>
           <a:ln w="19050">
             <a:solidFill>
-              <a:srgbClr val="263554"/>
+              <a:srgbClr val="263758"/>
             </a:solidFill>
           </a:ln>
         </p:spPr>
@@ -4078,8 +3887,8 @@
         </p:nvSpPr>
         <p:spPr>
           <a:xfrm>
-            <a:off x="960120" y="1645920"/>
-            <a:ext cx="4663440" cy="411480"/>
+            <a:off x="1188720" y="1554480"/>
+            <a:ext cx="9814255" cy="365760"/>
           </a:xfrm>
           <a:prstGeom prst="rect">
             <a:avLst/>
@@ -4093,14 +3902,14 @@
           <a:lstStyle/>
           <a:p>
             <a:pPr>
-              <a:defRPr sz="1400" b="1">
-                <a:solidFill>
-                  <a:srgbClr val="FBBF24"/>
+              <a:defRPr sz="1300" b="1">
+                <a:solidFill>
+                  <a:srgbClr val="22C55E"/>
                 </a:solidFill>
               </a:defRPr>
             </a:pPr>
             <a:r>
-              <a:t>The Problem in Academic Lab Clusters</a:t>
+              <a:t>OSDS Focus: Resource Aggregation, Cluster Workload Balancing &amp; Single-System Image</a:t>
             </a:r>
           </a:p>
         </p:txBody>
@@ -4113,8 +3922,8 @@
         </p:nvSpPr>
         <p:spPr>
           <a:xfrm>
-            <a:off x="960120" y="2011680"/>
-            <a:ext cx="4663440" cy="3931920"/>
+            <a:off x="1188720" y="2057400"/>
+            <a:ext cx="9814255" cy="3977640"/>
           </a:xfrm>
           <a:prstGeom prst="rect">
             <a:avLst/>
@@ -4122,159 +3931,152 @@
           <a:noFill/>
         </p:spPr>
         <p:txBody>
-          <a:bodyPr wrap="square" lIns="0" tIns="0">
+          <a:bodyPr wrap="square" lIns="0" tIns="0" rIns="0" bIns="0">
             <a:spAutoFit/>
           </a:bodyPr>
           <a:lstStyle/>
           <a:p>
             <a:pPr>
+              <a:spcBef>
+                <a:spcPts val="200"/>
+              </a:spcBef>
               <a:spcAft>
+                <a:spcPts val="1400"/>
+              </a:spcAft>
+            </a:pPr>
+            <a:r>
+              <a:rPr b="1" sz="1600">
+                <a:solidFill>
+                  <a:srgbClr val="38BDF8"/>
+                </a:solidFill>
+              </a:rPr>
+              <a:t>•  The Campus Problem: </a:t>
+            </a:r>
+            <a:r>
+              <a:rPr b="0" sz="1600">
+                <a:solidFill>
+                  <a:srgbClr val="E2E8F0"/>
+                </a:solidFill>
+              </a:rPr>
+              <a:t>College computer labs have dozens of dual/quad-core PCs that remain idle for over 60% of the day while computationally intensive student tasks wait in line.</a:t>
+            </a:r>
+          </a:p>
+          <a:p>
+            <a:pPr>
+              <a:spcBef>
                 <a:spcPts val="200"/>
+              </a:spcBef>
+              <a:spcAft>
+                <a:spcPts val="1400"/>
               </a:spcAft>
-              <a:defRPr b="1" sz="1200">
-                <a:solidFill>
-                  <a:srgbClr val="FFFFFF"/>
-                </a:solidFill>
-              </a:defRPr>
-            </a:pPr>
-            <a:r>
-              <a:t>• Compute Resource Contention: </a:t>
-            </a:r>
-            <a:r>
-              <a:rPr b="0" sz="1150">
-                <a:solidFill>
-                  <a:srgbClr val="94A3B8"/>
-                </a:solidFill>
-              </a:rPr>
-              <a:t>Uncoordinated student jobs cause starvation, unbounded wait times, and system crashes.</a:t>
-            </a:r>
-          </a:p>
-          <a:p>
-            <a:pPr>
+            </a:pPr>
+            <a:r>
+              <a:rPr b="1" sz="1600">
+                <a:solidFill>
+                  <a:srgbClr val="38BDF8"/>
+                </a:solidFill>
+              </a:rPr>
+              <a:t>•  Industrial Limitation: </a:t>
+            </a:r>
+            <a:r>
+              <a:rPr b="0" sz="1600">
+                <a:solidFill>
+                  <a:srgbClr val="E2E8F0"/>
+                </a:solidFill>
+              </a:rPr>
+              <a:t>Existing production systems like Kubernetes or Slurm require heavy enterprise setup, high memory overhead, and hide low-level OS algorithms from learners.</a:t>
+            </a:r>
+          </a:p>
+          <a:p>
+            <a:pPr>
+              <a:spcBef>
+                <a:spcPts val="200"/>
+              </a:spcBef>
               <a:spcAft>
+                <a:spcPts val="1400"/>
+              </a:spcAft>
+            </a:pPr>
+            <a:r>
+              <a:rPr b="1" sz="1600">
+                <a:solidFill>
+                  <a:srgbClr val="38BDF8"/>
+                </a:solidFill>
+              </a:rPr>
+              <a:t>•  The NEXUS-OS Solution: </a:t>
+            </a:r>
+            <a:r>
+              <a:rPr b="0" sz="1600">
+                <a:solidFill>
+                  <a:srgbClr val="E2E8F0"/>
+                </a:solidFill>
+              </a:rPr>
+              <a:t>We built a lightweight, educational distributed operating system that unifies separate lab workstations into a single cooperative compute cluster.</a:t>
+            </a:r>
+          </a:p>
+          <a:p>
+            <a:pPr>
+              <a:spcBef>
                 <a:spcPts val="200"/>
+              </a:spcBef>
+              <a:spcAft>
+                <a:spcPts val="1400"/>
               </a:spcAft>
-              <a:defRPr b="1" sz="1200">
-                <a:solidFill>
-                  <a:srgbClr val="FFFFFF"/>
-                </a:solidFill>
-              </a:defRPr>
-            </a:pPr>
-            <a:r>
-              <a:t>• Deadlock in Multi-Resource Access: </a:t>
-            </a:r>
-            <a:r>
-              <a:rPr b="0" sz="1150">
-                <a:solidFill>
-                  <a:srgbClr val="94A3B8"/>
-                </a:solidFill>
-              </a:rPr>
-              <a:t>Concurrent execution without admission control leads to circular wait deadlocks across memory, cores, and I/O.</a:t>
-            </a:r>
-          </a:p>
-          <a:p>
-            <a:pPr>
+            </a:pPr>
+            <a:r>
+              <a:rPr b="1" sz="1600">
+                <a:solidFill>
+                  <a:srgbClr val="38BDF8"/>
+                </a:solidFill>
+              </a:rPr>
+              <a:t>•  Single System Image: </a:t>
+            </a:r>
+            <a:r>
+              <a:rPr b="0" sz="1600">
+                <a:solidFill>
+                  <a:srgbClr val="E2E8F0"/>
+                </a:solidFill>
+              </a:rPr>
+              <a:t>Students submit jobs to one central interface without needing to know which physical machine actually executes their code.</a:t>
+            </a:r>
+          </a:p>
+          <a:p>
+            <a:pPr>
+              <a:spcBef>
+                <a:spcPts val="200"/>
+              </a:spcBef>
               <a:spcAft>
-                <a:spcPts val="200"/>
+                <a:spcPts val="1400"/>
               </a:spcAft>
-              <a:defRPr b="1" sz="1200">
-                <a:solidFill>
-                  <a:srgbClr val="FFFFFF"/>
-                </a:solidFill>
-              </a:defRPr>
-            </a:pPr>
-            <a:r>
-              <a:t>• Data Divergence &amp; Bit Rot: </a:t>
-            </a:r>
-            <a:r>
-              <a:rPr b="0" sz="1150">
-                <a:solidFill>
-                  <a:srgbClr val="94A3B8"/>
-                </a:solidFill>
-              </a:rPr>
-              <a:t>Shared laboratory datasets are easily overwritten, corrupted, or lost upon single-disk failure.</a:t>
-            </a:r>
-          </a:p>
-          <a:p>
-            <a:pPr>
-              <a:spcAft>
-                <a:spcPts val="200"/>
-              </a:spcAft>
-              <a:defRPr b="1" sz="1200">
-                <a:solidFill>
-                  <a:srgbClr val="FFFFFF"/>
-                </a:solidFill>
-              </a:defRPr>
-            </a:pPr>
-            <a:r>
-              <a:t>• Wall-Clock Drift: </a:t>
-            </a:r>
-            <a:r>
-              <a:rPr b="0" sz="1150">
-                <a:solidFill>
-                  <a:srgbClr val="94A3B8"/>
-                </a:solidFill>
-              </a:rPr>
-              <a:t>Physical workstation clock differences make distributed event debugging and causality analysis impossible.</a:t>
-            </a:r>
-          </a:p>
-        </p:txBody>
-      </p:sp>
-      <p:sp>
-        <p:nvSpPr>
-          <p:cNvPr id="8" name="Rounded Rectangle 7"/>
-          <p:cNvSpPr/>
-          <p:nvPr/>
-        </p:nvSpPr>
-        <p:spPr>
-          <a:xfrm>
-            <a:off x="6217920" y="1463040"/>
-            <a:ext cx="5242255" cy="4754880"/>
-          </a:xfrm>
-          <a:prstGeom prst="roundRect">
-            <a:avLst/>
-          </a:prstGeom>
-          <a:solidFill>
-            <a:srgbClr val="162038"/>
-          </a:solidFill>
-          <a:ln w="19050">
-            <a:solidFill>
-              <a:srgbClr val="263554"/>
-            </a:solidFill>
-          </a:ln>
-        </p:spPr>
-        <p:style>
-          <a:lnRef idx="1">
-            <a:schemeClr val="accent1"/>
-          </a:lnRef>
-          <a:fillRef idx="3">
-            <a:schemeClr val="accent1"/>
-          </a:fillRef>
-          <a:effectRef idx="2">
-            <a:schemeClr val="accent1"/>
-          </a:effectRef>
-          <a:fontRef idx="minor">
-            <a:schemeClr val="lt1"/>
-          </a:fontRef>
-        </p:style>
-        <p:txBody>
-          <a:bodyPr rtlCol="0" anchor="ctr"/>
-          <a:lstStyle/>
-          <a:p>
-            <a:pPr algn="ctr"/>
-          </a:p>
-        </p:txBody>
-      </p:sp>
-      <p:sp>
-        <p:nvSpPr>
-          <p:cNvPr id="9" name="TextBox 8"/>
+            </a:pPr>
+            <a:r>
+              <a:rPr b="1" sz="1600">
+                <a:solidFill>
+                  <a:srgbClr val="38BDF8"/>
+                </a:solidFill>
+              </a:rPr>
+              <a:t>•  Core Engineering Objective: </a:t>
+            </a:r>
+            <a:r>
+              <a:rPr b="0" sz="1600">
+                <a:solidFill>
+                  <a:srgbClr val="E2E8F0"/>
+                </a:solidFill>
+              </a:rPr>
+              <a:t>Provide a reliable, live-demonstrable platform that translates textbook operating systems theory into real, running software.</a:t>
+            </a:r>
+          </a:p>
+        </p:txBody>
+      </p:sp>
+      <p:sp>
+        <p:nvSpPr>
+          <p:cNvPr id="8" name="TextBox 7"/>
           <p:cNvSpPr txBox="1"/>
           <p:nvPr/>
         </p:nvSpPr>
         <p:spPr>
           <a:xfrm>
-            <a:off x="6446520" y="1645920"/>
-            <a:ext cx="4785055" cy="411480"/>
+            <a:off x="1188720" y="5669280"/>
+            <a:ext cx="9814255" cy="365760"/>
           </a:xfrm>
           <a:prstGeom prst="rect">
             <a:avLst/>
@@ -4288,129 +4090,14 @@
           <a:lstStyle/>
           <a:p>
             <a:pPr>
-              <a:defRPr sz="1400" b="1">
-                <a:solidFill>
-                  <a:srgbClr val="22C55E"/>
+              <a:defRPr sz="1200" b="1">
+                <a:solidFill>
+                  <a:srgbClr val="FBBF24"/>
                 </a:solidFill>
               </a:defRPr>
             </a:pPr>
             <a:r>
-              <a:t>NEXUS-OS Distributed Solution</a:t>
-            </a:r>
-          </a:p>
-        </p:txBody>
-      </p:sp>
-      <p:sp>
-        <p:nvSpPr>
-          <p:cNvPr id="10" name="TextBox 9"/>
-          <p:cNvSpPr txBox="1"/>
-          <p:nvPr/>
-        </p:nvSpPr>
-        <p:spPr>
-          <a:xfrm>
-            <a:off x="6446520" y="2011680"/>
-            <a:ext cx="4754880" cy="3931920"/>
-          </a:xfrm>
-          <a:prstGeom prst="rect">
-            <a:avLst/>
-          </a:prstGeom>
-          <a:noFill/>
-        </p:spPr>
-        <p:txBody>
-          <a:bodyPr wrap="square" lIns="0" tIns="0">
-            <a:spAutoFit/>
-          </a:bodyPr>
-          <a:lstStyle/>
-          <a:p>
-            <a:pPr>
-              <a:spcAft>
-                <a:spcPts val="200"/>
-              </a:spcAft>
-              <a:defRPr b="1" sz="1200">
-                <a:solidFill>
-                  <a:srgbClr val="FFFFFF"/>
-                </a:solidFill>
-              </a:defRPr>
-            </a:pPr>
-            <a:r>
-              <a:t>• Centralized Coordinator (:9000): </a:t>
-            </a:r>
-            <a:r>
-              <a:rPr b="0" sz="1150">
-                <a:solidFill>
-                  <a:srgbClr val="94A3B8"/>
-                </a:solidFill>
-              </a:rPr>
-              <a:t>Authoritative control plane hosting scheduler, Banker's admission control, DFS catalog, and lock manager.</a:t>
-            </a:r>
-          </a:p>
-          <a:p>
-            <a:pPr>
-              <a:spcAft>
-                <a:spcPts val="200"/>
-              </a:spcAft>
-              <a:defRPr b="1" sz="1200">
-                <a:solidFill>
-                  <a:srgbClr val="FFFFFF"/>
-                </a:solidFill>
-              </a:defRPr>
-            </a:pPr>
-            <a:r>
-              <a:t>• 3 Dedicated Worker Nodes (:9001-:9003): </a:t>
-            </a:r>
-            <a:r>
-              <a:rPr b="0" sz="1150">
-                <a:solidFill>
-                  <a:srgbClr val="94A3B8"/>
-                </a:solidFill>
-              </a:rPr>
-              <a:t>Execute dispatched compute tasks, store 64 KB block replicas, and maintain in-memory caches.</a:t>
-            </a:r>
-          </a:p>
-          <a:p>
-            <a:pPr>
-              <a:spcAft>
-                <a:spcPts val="200"/>
-              </a:spcAft>
-              <a:defRPr b="1" sz="1200">
-                <a:solidFill>
-                  <a:srgbClr val="FFFFFF"/>
-                </a:solidFill>
-              </a:defRPr>
-            </a:pPr>
-            <a:r>
-              <a:t>• Live Web Control Center (:8080): </a:t>
-            </a:r>
-            <a:r>
-              <a:rPr b="0" sz="1150">
-                <a:solidFill>
-                  <a:srgbClr val="94A3B8"/>
-                </a:solidFill>
-              </a:rPr>
-              <a:t>Real-time single-page dashboard rendering cluster PCB, Gantt chart, WFG, and fault controls.</a:t>
-            </a:r>
-          </a:p>
-          <a:p>
-            <a:pPr>
-              <a:spcAft>
-                <a:spcPts val="200"/>
-              </a:spcAft>
-              <a:defRPr b="1" sz="1200">
-                <a:solidFill>
-                  <a:srgbClr val="FFFFFF"/>
-                </a:solidFill>
-              </a:defRPr>
-            </a:pPr>
-            <a:r>
-              <a:t>• Single-Command Deployment: </a:t>
-            </a:r>
-            <a:r>
-              <a:rPr b="0" sz="1150">
-                <a:solidFill>
-                  <a:srgbClr val="94A3B8"/>
-                </a:solidFill>
-              </a:rPr>
-              <a:t>Complete 5-process cluster launches via `python app.py` across commodity lab hardware with zero external cloud dependencies.</a:t>
+              <a:t>KEY TAKEAWAY: NEXUS-OS eliminates lab hardware waste by coordinating idle machines as one shared system.</a:t>
             </a:r>
           </a:p>
         </p:txBody>
@@ -4484,8 +4171,8 @@
         </p:nvSpPr>
         <p:spPr>
           <a:xfrm>
-            <a:off x="731520" y="365760"/>
-            <a:ext cx="10728655" cy="320040"/>
+            <a:off x="822960" y="365760"/>
+            <a:ext cx="10515600" cy="292608"/>
           </a:xfrm>
           <a:prstGeom prst="rect">
             <a:avLst/>
@@ -4499,14 +4186,14 @@
           <a:lstStyle/>
           <a:p>
             <a:pPr>
-              <a:defRPr sz="1000" b="1">
+              <a:defRPr sz="1100" b="1">
                 <a:solidFill>
                   <a:srgbClr val="38BDF8"/>
                 </a:solidFill>
               </a:defRPr>
             </a:pPr>
             <a:r>
-              <a:t>THEORETICAL FOUNDATION</a:t>
+              <a:t>SYSTEM ARCHITECTURE</a:t>
             </a:r>
           </a:p>
         </p:txBody>
@@ -4519,8 +4206,8 @@
         </p:nvSpPr>
         <p:spPr>
           <a:xfrm>
-            <a:off x="731520" y="685800"/>
-            <a:ext cx="10728655" cy="594360"/>
+            <a:off x="822960" y="658368"/>
+            <a:ext cx="10515600" cy="502920"/>
           </a:xfrm>
           <a:prstGeom prst="rect">
             <a:avLst/>
@@ -4541,7 +4228,7 @@
               </a:defRPr>
             </a:pPr>
             <a:r>
-              <a:t>2. Core OSDS Concepts &amp; Production Systems Mapping</a:t>
+              <a:t>Two-Tier Master-Worker Cluster Architecture</a:t>
             </a:r>
           </a:p>
         </p:txBody>
@@ -4554,18 +4241,18 @@
         </p:nvSpPr>
         <p:spPr>
           <a:xfrm>
-            <a:off x="731520" y="1463040"/>
-            <a:ext cx="3474720" cy="4754880"/>
+            <a:off x="822960" y="1280160"/>
+            <a:ext cx="10545775" cy="4983480"/>
           </a:xfrm>
           <a:prstGeom prst="roundRect">
             <a:avLst/>
           </a:prstGeom>
           <a:solidFill>
-            <a:srgbClr val="162038"/>
+            <a:srgbClr val="141E34"/>
           </a:solidFill>
           <a:ln w="19050">
             <a:solidFill>
-              <a:srgbClr val="263554"/>
+              <a:srgbClr val="263758"/>
             </a:solidFill>
           </a:ln>
         </p:spPr>
@@ -4599,8 +4286,8 @@
         </p:nvSpPr>
         <p:spPr>
           <a:xfrm>
-            <a:off x="960120" y="1645920"/>
-            <a:ext cx="3017520" cy="411480"/>
+            <a:off x="1188720" y="1554480"/>
+            <a:ext cx="9814255" cy="365760"/>
           </a:xfrm>
           <a:prstGeom prst="rect">
             <a:avLst/>
@@ -4614,14 +4301,14 @@
           <a:lstStyle/>
           <a:p>
             <a:pPr>
-              <a:defRPr sz="1400" b="1">
-                <a:solidFill>
-                  <a:srgbClr val="38BDF8"/>
+              <a:defRPr sz="1300" b="1">
+                <a:solidFill>
+                  <a:srgbClr val="22C55E"/>
                 </a:solidFill>
               </a:defRPr>
             </a:pPr>
             <a:r>
-              <a:t>Single-Node OS Foundations</a:t>
+              <a:t>OSDS Focus: Coordinator-Worker Topology, RPC Communication &amp; Global State Synchronization</a:t>
             </a:r>
           </a:p>
         </p:txBody>
@@ -4634,8 +4321,8 @@
         </p:nvSpPr>
         <p:spPr>
           <a:xfrm>
-            <a:off x="914400" y="2011680"/>
-            <a:ext cx="3108960" cy="3931920"/>
+            <a:off x="1188720" y="2057400"/>
+            <a:ext cx="9814255" cy="3977640"/>
           </a:xfrm>
           <a:prstGeom prst="rect">
             <a:avLst/>
@@ -4643,202 +4330,152 @@
           <a:noFill/>
         </p:spPr>
         <p:txBody>
-          <a:bodyPr wrap="square" lIns="0" tIns="0">
+          <a:bodyPr wrap="square" lIns="0" tIns="0" rIns="0" bIns="0">
             <a:spAutoFit/>
           </a:bodyPr>
           <a:lstStyle/>
           <a:p>
             <a:pPr>
+              <a:spcBef>
+                <a:spcPts val="200"/>
+              </a:spcBef>
               <a:spcAft>
+                <a:spcPts val="1400"/>
+              </a:spcAft>
+            </a:pPr>
+            <a:r>
+              <a:rPr b="1" sz="1600">
+                <a:solidFill>
+                  <a:srgbClr val="38BDF8"/>
+                </a:solidFill>
+              </a:rPr>
+              <a:t>•  Central Coordinator: </a:t>
+            </a:r>
+            <a:r>
+              <a:rPr b="0" sz="1600">
+                <a:solidFill>
+                  <a:srgbClr val="E2E8F0"/>
+                </a:solidFill>
+              </a:rPr>
+              <a:t>Acts as the cluster master. Exposes REST APIs, manages global process queues, executes Banker's algorithm, and tracks active worker nodes.</a:t>
+            </a:r>
+          </a:p>
+          <a:p>
+            <a:pPr>
+              <a:spcBef>
                 <a:spcPts val="200"/>
+              </a:spcBef>
+              <a:spcAft>
+                <a:spcPts val="1400"/>
               </a:spcAft>
-              <a:defRPr b="1" sz="1100">
-                <a:solidFill>
-                  <a:srgbClr val="FFFFFF"/>
-                </a:solidFill>
-              </a:defRPr>
-            </a:pPr>
-            <a:r>
-              <a:t>• CPU Scheduling</a:t>
-            </a:r>
-            <a:br/>
-            <a:r>
-              <a:t>  </a:t>
-            </a:r>
-            <a:r>
-              <a:rPr b="0" sz="1000">
-                <a:solidFill>
-                  <a:srgbClr val="94A3B8"/>
-                </a:solidFill>
-              </a:rPr>
-              <a:t>FCFS, SJF, SRTF, RR, Priority+Aging algorithms</a:t>
-            </a:r>
-          </a:p>
-          <a:p>
-            <a:pPr>
+            </a:pPr>
+            <a:r>
+              <a:rPr b="1" sz="1600">
+                <a:solidFill>
+                  <a:srgbClr val="38BDF8"/>
+                </a:solidFill>
+              </a:rPr>
+              <a:t>•  Worker Nodes (Node 1, Node 2, Node 3): </a:t>
+            </a:r>
+            <a:r>
+              <a:rPr b="0" sz="1600">
+                <a:solidFill>
+                  <a:srgbClr val="E2E8F0"/>
+                </a:solidFill>
+              </a:rPr>
+              <a:t>Independent worker daemons running on separate lab machines that pull assigned tasks, execute them, and stream back results.</a:t>
+            </a:r>
+          </a:p>
+          <a:p>
+            <a:pPr>
+              <a:spcBef>
+                <a:spcPts val="200"/>
+              </a:spcBef>
               <a:spcAft>
+                <a:spcPts val="1400"/>
+              </a:spcAft>
+            </a:pPr>
+            <a:r>
+              <a:rPr b="1" sz="1600">
+                <a:solidFill>
+                  <a:srgbClr val="38BDF8"/>
+                </a:solidFill>
+              </a:rPr>
+              <a:t>•  Heartbeat Failure Detector: </a:t>
+            </a:r>
+            <a:r>
+              <a:rPr b="0" sz="1600">
+                <a:solidFill>
+                  <a:srgbClr val="E2E8F0"/>
+                </a:solidFill>
+              </a:rPr>
+              <a:t>Each worker transmits heartbeats every 10 seconds. The Coordinator flags any silent node after a 30-second timeout threshold.</a:t>
+            </a:r>
+          </a:p>
+          <a:p>
+            <a:pPr>
+              <a:spcBef>
                 <a:spcPts val="200"/>
+              </a:spcBef>
+              <a:spcAft>
+                <a:spcPts val="1400"/>
               </a:spcAft>
-              <a:defRPr b="1" sz="1100">
-                <a:solidFill>
-                  <a:srgbClr val="FFFFFF"/>
-                </a:solidFill>
-              </a:defRPr>
-            </a:pPr>
-            <a:r>
-              <a:t>• Process Control Block (PCB)</a:t>
-            </a:r>
-            <a:br/>
-            <a:r>
-              <a:t>  </a:t>
-            </a:r>
-            <a:r>
-              <a:rPr b="0" sz="1000">
-                <a:solidFill>
-                  <a:srgbClr val="94A3B8"/>
-                </a:solidFill>
-              </a:rPr>
-              <a:t>Task states, context switching, PID management</a:t>
-            </a:r>
-          </a:p>
-          <a:p>
-            <a:pPr>
+            </a:pPr>
+            <a:r>
+              <a:rPr b="1" sz="1600">
+                <a:solidFill>
+                  <a:srgbClr val="38BDF8"/>
+                </a:solidFill>
+              </a:rPr>
+              <a:t>•  Real-Time Telemetry: </a:t>
+            </a:r>
+            <a:r>
+              <a:rPr b="0" sz="1600">
+                <a:solidFill>
+                  <a:srgbClr val="E2E8F0"/>
+                </a:solidFill>
+              </a:rPr>
+              <a:t>Uses Server-Sent Events (SSE) and asynchronous polling to stream live cluster state, CPU loads, and logs directly to the dashboard.</a:t>
+            </a:r>
+          </a:p>
+          <a:p>
+            <a:pPr>
+              <a:spcBef>
+                <a:spcPts val="200"/>
+              </a:spcBef>
               <a:spcAft>
-                <a:spcPts val="200"/>
+                <a:spcPts val="1400"/>
               </a:spcAft>
-              <a:defRPr b="1" sz="1100">
-                <a:solidFill>
-                  <a:srgbClr val="FFFFFF"/>
-                </a:solidFill>
-              </a:defRPr>
-            </a:pPr>
-            <a:r>
-              <a:t>• Deadlock Prevention</a:t>
-            </a:r>
-            <a:br/>
-            <a:r>
-              <a:t>  </a:t>
-            </a:r>
-            <a:r>
-              <a:rPr b="0" sz="1000">
-                <a:solidFill>
-                  <a:srgbClr val="94A3B8"/>
-                </a:solidFill>
-              </a:rPr>
-              <a:t>Dijkstra's Banker's Algorithm admission safety</a:t>
-            </a:r>
-          </a:p>
-          <a:p>
-            <a:pPr>
-              <a:spcAft>
-                <a:spcPts val="200"/>
-              </a:spcAft>
-              <a:defRPr b="1" sz="1100">
-                <a:solidFill>
-                  <a:srgbClr val="FFFFFF"/>
-                </a:solidFill>
-              </a:defRPr>
-            </a:pPr>
-            <a:r>
-              <a:t>• Memory &amp; Paging</a:t>
-            </a:r>
-            <a:br/>
-            <a:r>
-              <a:t>  </a:t>
-            </a:r>
-            <a:r>
-              <a:rPr b="0" sz="1000">
-                <a:solidFill>
-                  <a:srgbClr val="94A3B8"/>
-                </a:solidFill>
-              </a:rPr>
-              <a:t>FIFO, LRU, Optimal page replacement &amp; Belady's Anomaly</a:t>
-            </a:r>
-          </a:p>
-          <a:p>
-            <a:pPr>
-              <a:spcAft>
-                <a:spcPts val="200"/>
-              </a:spcAft>
-              <a:defRPr b="1" sz="1100">
-                <a:solidFill>
-                  <a:srgbClr val="FFFFFF"/>
-                </a:solidFill>
-              </a:defRPr>
-            </a:pPr>
-            <a:r>
-              <a:t>• Classical Concurrency</a:t>
-            </a:r>
-            <a:br/>
-            <a:r>
-              <a:t>  </a:t>
-            </a:r>
-            <a:r>
-              <a:rPr b="0" sz="1000">
-                <a:solidFill>
-                  <a:srgbClr val="94A3B8"/>
-                </a:solidFill>
-              </a:rPr>
-              <a:t>Semaphores, Mutex, Readers-Writers, Dining Philosophers</a:t>
-            </a:r>
-          </a:p>
-        </p:txBody>
-      </p:sp>
-      <p:sp>
-        <p:nvSpPr>
-          <p:cNvPr id="8" name="Rounded Rectangle 7"/>
-          <p:cNvSpPr/>
-          <p:nvPr/>
-        </p:nvSpPr>
-        <p:spPr>
-          <a:xfrm>
-            <a:off x="4343400" y="1463040"/>
-            <a:ext cx="3474720" cy="4754880"/>
-          </a:xfrm>
-          <a:prstGeom prst="roundRect">
-            <a:avLst/>
-          </a:prstGeom>
-          <a:solidFill>
-            <a:srgbClr val="162038"/>
-          </a:solidFill>
-          <a:ln w="19050">
-            <a:solidFill>
-              <a:srgbClr val="263554"/>
-            </a:solidFill>
-          </a:ln>
-        </p:spPr>
-        <p:style>
-          <a:lnRef idx="1">
-            <a:schemeClr val="accent1"/>
-          </a:lnRef>
-          <a:fillRef idx="3">
-            <a:schemeClr val="accent1"/>
-          </a:fillRef>
-          <a:effectRef idx="2">
-            <a:schemeClr val="accent1"/>
-          </a:effectRef>
-          <a:fontRef idx="minor">
-            <a:schemeClr val="lt1"/>
-          </a:fontRef>
-        </p:style>
-        <p:txBody>
-          <a:bodyPr rtlCol="0" anchor="ctr"/>
-          <a:lstStyle/>
-          <a:p>
-            <a:pPr algn="ctr"/>
-          </a:p>
-        </p:txBody>
-      </p:sp>
-      <p:sp>
-        <p:nvSpPr>
-          <p:cNvPr id="9" name="TextBox 8"/>
+            </a:pPr>
+            <a:r>
+              <a:rPr b="1" sz="1600">
+                <a:solidFill>
+                  <a:srgbClr val="38BDF8"/>
+                </a:solidFill>
+              </a:rPr>
+              <a:t>•  Decoupled Design: </a:t>
+            </a:r>
+            <a:r>
+              <a:rPr b="0" sz="1600">
+                <a:solidFill>
+                  <a:srgbClr val="E2E8F0"/>
+                </a:solidFill>
+              </a:rPr>
+              <a:t>Workers can join, leave, or restart dynamically without crashing the coordinator or terminating active cluster management.</a:t>
+            </a:r>
+          </a:p>
+        </p:txBody>
+      </p:sp>
+      <p:sp>
+        <p:nvSpPr>
+          <p:cNvPr id="8" name="TextBox 7"/>
           <p:cNvSpPr txBox="1"/>
           <p:nvPr/>
         </p:nvSpPr>
         <p:spPr>
           <a:xfrm>
-            <a:off x="4572000" y="1645920"/>
-            <a:ext cx="3017520" cy="411480"/>
+            <a:off x="1188720" y="5669280"/>
+            <a:ext cx="9814255" cy="365760"/>
           </a:xfrm>
           <a:prstGeom prst="rect">
             <a:avLst/>
@@ -4852,410 +4489,14 @@
           <a:lstStyle/>
           <a:p>
             <a:pPr>
-              <a:defRPr sz="1400" b="1">
-                <a:solidFill>
-                  <a:srgbClr val="22C55E"/>
+              <a:defRPr sz="1200" b="1">
+                <a:solidFill>
+                  <a:srgbClr val="FBBF24"/>
                 </a:solidFill>
               </a:defRPr>
             </a:pPr>
             <a:r>
-              <a:t>Distributed Systems Principles</a:t>
-            </a:r>
-          </a:p>
-        </p:txBody>
-      </p:sp>
-      <p:sp>
-        <p:nvSpPr>
-          <p:cNvPr id="10" name="TextBox 9"/>
-          <p:cNvSpPr txBox="1"/>
-          <p:nvPr/>
-        </p:nvSpPr>
-        <p:spPr>
-          <a:xfrm>
-            <a:off x="4526280" y="2011680"/>
-            <a:ext cx="3108960" cy="3931920"/>
-          </a:xfrm>
-          <a:prstGeom prst="rect">
-            <a:avLst/>
-          </a:prstGeom>
-          <a:noFill/>
-        </p:spPr>
-        <p:txBody>
-          <a:bodyPr wrap="square" lIns="0" tIns="0">
-            <a:spAutoFit/>
-          </a:bodyPr>
-          <a:lstStyle/>
-          <a:p>
-            <a:pPr>
-              <a:spcAft>
-                <a:spcPts val="200"/>
-              </a:spcAft>
-              <a:defRPr b="1" sz="1100">
-                <a:solidFill>
-                  <a:srgbClr val="FFFFFF"/>
-                </a:solidFill>
-              </a:defRPr>
-            </a:pPr>
-            <a:r>
-              <a:t>• Cluster Coordination</a:t>
-            </a:r>
-            <a:br/>
-            <a:r>
-              <a:t>  </a:t>
-            </a:r>
-            <a:r>
-              <a:rPr b="0" sz="1000">
-                <a:solidFill>
-                  <a:srgbClr val="94A3B8"/>
-                </a:solidFill>
-              </a:rPr>
-              <a:t>Centralized control plane, heartbeat failure detection</a:t>
-            </a:r>
-          </a:p>
-          <a:p>
-            <a:pPr>
-              <a:spcAft>
-                <a:spcPts val="200"/>
-              </a:spcAft>
-              <a:defRPr b="1" sz="1100">
-                <a:solidFill>
-                  <a:srgbClr val="FFFFFF"/>
-                </a:solidFill>
-              </a:defRPr>
-            </a:pPr>
-            <a:r>
-              <a:t>• Logical &amp; Vector Clocks</a:t>
-            </a:r>
-            <a:br/>
-            <a:r>
-              <a:t>  </a:t>
-            </a:r>
-            <a:r>
-              <a:rPr b="0" sz="1000">
-                <a:solidFill>
-                  <a:srgbClr val="94A3B8"/>
-                </a:solidFill>
-              </a:rPr>
-              <a:t>Lamport total ordering &amp; Fidge-Mattern causality</a:t>
-            </a:r>
-          </a:p>
-          <a:p>
-            <a:pPr>
-              <a:spcAft>
-                <a:spcPts val="200"/>
-              </a:spcAft>
-              <a:defRPr b="1" sz="1100">
-                <a:solidFill>
-                  <a:srgbClr val="FFFFFF"/>
-                </a:solidFill>
-              </a:defRPr>
-            </a:pPr>
-            <a:r>
-              <a:t>• Mutual Exclusion</a:t>
-            </a:r>
-            <a:br/>
-            <a:r>
-              <a:t>  </a:t>
-            </a:r>
-            <a:r>
-              <a:rPr b="0" sz="1000">
-                <a:solidFill>
-                  <a:srgbClr val="94A3B8"/>
-                </a:solidFill>
-              </a:rPr>
-              <a:t>Ricart-Agrawala 2(N-1) peer-to-peer RPC protocol</a:t>
-            </a:r>
-          </a:p>
-          <a:p>
-            <a:pPr>
-              <a:spcAft>
-                <a:spcPts val="200"/>
-              </a:spcAft>
-              <a:defRPr b="1" sz="1100">
-                <a:solidFill>
-                  <a:srgbClr val="FFFFFF"/>
-                </a:solidFill>
-              </a:defRPr>
-            </a:pPr>
-            <a:r>
-              <a:t>• Distributed Storage</a:t>
-            </a:r>
-            <a:br/>
-            <a:r>
-              <a:t>  </a:t>
-            </a:r>
-            <a:r>
-              <a:rPr b="0" sz="1000">
-                <a:solidFill>
-                  <a:srgbClr val="94A3B8"/>
-                </a:solidFill>
-              </a:rPr>
-              <a:t>Block chunking, 2x pipeline replication, SHA-256 scrubbing</a:t>
-            </a:r>
-          </a:p>
-          <a:p>
-            <a:pPr>
-              <a:spcAft>
-                <a:spcPts val="200"/>
-              </a:spcAft>
-              <a:defRPr b="1" sz="1100">
-                <a:solidFill>
-                  <a:srgbClr val="FFFFFF"/>
-                </a:solidFill>
-              </a:defRPr>
-            </a:pPr>
-            <a:r>
-              <a:t>• Optimistic Concurrency</a:t>
-            </a:r>
-            <a:br/>
-            <a:r>
-              <a:t>  </a:t>
-            </a:r>
-            <a:r>
-              <a:rPr b="0" sz="1000">
-                <a:solidFill>
-                  <a:srgbClr val="94A3B8"/>
-                </a:solidFill>
-              </a:rPr>
-              <a:t>Versioned file editing &amp; Vector Clock conflict resolution</a:t>
-            </a:r>
-          </a:p>
-        </p:txBody>
-      </p:sp>
-      <p:sp>
-        <p:nvSpPr>
-          <p:cNvPr id="11" name="Rounded Rectangle 10"/>
-          <p:cNvSpPr/>
-          <p:nvPr/>
-        </p:nvSpPr>
-        <p:spPr>
-          <a:xfrm>
-            <a:off x="7955279" y="1463040"/>
-            <a:ext cx="3474720" cy="4754880"/>
-          </a:xfrm>
-          <a:prstGeom prst="roundRect">
-            <a:avLst/>
-          </a:prstGeom>
-          <a:solidFill>
-            <a:srgbClr val="162038"/>
-          </a:solidFill>
-          <a:ln w="19050">
-            <a:solidFill>
-              <a:srgbClr val="263554"/>
-            </a:solidFill>
-          </a:ln>
-        </p:spPr>
-        <p:style>
-          <a:lnRef idx="1">
-            <a:schemeClr val="accent1"/>
-          </a:lnRef>
-          <a:fillRef idx="3">
-            <a:schemeClr val="accent1"/>
-          </a:fillRef>
-          <a:effectRef idx="2">
-            <a:schemeClr val="accent1"/>
-          </a:effectRef>
-          <a:fontRef idx="minor">
-            <a:schemeClr val="lt1"/>
-          </a:fontRef>
-        </p:style>
-        <p:txBody>
-          <a:bodyPr rtlCol="0" anchor="ctr"/>
-          <a:lstStyle/>
-          <a:p>
-            <a:pPr algn="ctr"/>
-          </a:p>
-        </p:txBody>
-      </p:sp>
-      <p:sp>
-        <p:nvSpPr>
-          <p:cNvPr id="12" name="TextBox 11"/>
-          <p:cNvSpPr txBox="1"/>
-          <p:nvPr/>
-        </p:nvSpPr>
-        <p:spPr>
-          <a:xfrm>
-            <a:off x="8183879" y="1645920"/>
-            <a:ext cx="3017520" cy="411480"/>
-          </a:xfrm>
-          <a:prstGeom prst="rect">
-            <a:avLst/>
-          </a:prstGeom>
-          <a:noFill/>
-        </p:spPr>
-        <p:txBody>
-          <a:bodyPr wrap="square" lIns="0" tIns="0" rIns="0" bIns="0">
-            <a:spAutoFit/>
-          </a:bodyPr>
-          <a:lstStyle/>
-          <a:p>
-            <a:pPr>
-              <a:defRPr sz="1400" b="1">
-                <a:solidFill>
-                  <a:srgbClr val="FBBF24"/>
-                </a:solidFill>
-              </a:defRPr>
-            </a:pPr>
-            <a:r>
-              <a:t>Real-World Industrial Parallels</a:t>
-            </a:r>
-          </a:p>
-        </p:txBody>
-      </p:sp>
-      <p:sp>
-        <p:nvSpPr>
-          <p:cNvPr id="13" name="TextBox 12"/>
-          <p:cNvSpPr txBox="1"/>
-          <p:nvPr/>
-        </p:nvSpPr>
-        <p:spPr>
-          <a:xfrm>
-            <a:off x="8138159" y="2011680"/>
-            <a:ext cx="3108960" cy="3931920"/>
-          </a:xfrm>
-          <a:prstGeom prst="rect">
-            <a:avLst/>
-          </a:prstGeom>
-          <a:noFill/>
-        </p:spPr>
-        <p:txBody>
-          <a:bodyPr wrap="square" lIns="0" tIns="0">
-            <a:spAutoFit/>
-          </a:bodyPr>
-          <a:lstStyle/>
-          <a:p>
-            <a:pPr>
-              <a:spcAft>
-                <a:spcPts val="200"/>
-              </a:spcAft>
-              <a:defRPr b="1" sz="1100">
-                <a:solidFill>
-                  <a:srgbClr val="FFFFFF"/>
-                </a:solidFill>
-              </a:defRPr>
-            </a:pPr>
-            <a:r>
-              <a:t>• Slurm Workload Manager</a:t>
-            </a:r>
-            <a:br/>
-            <a:r>
-              <a:t>  </a:t>
-            </a:r>
-            <a:r>
-              <a:rPr b="0" sz="1000">
-                <a:solidFill>
-                  <a:srgbClr val="94A3B8"/>
-                </a:solidFill>
-              </a:rPr>
-              <a:t>Cluster batch job dispatching &amp; heavy-tailed traces</a:t>
-            </a:r>
-          </a:p>
-          <a:p>
-            <a:pPr>
-              <a:spcAft>
-                <a:spcPts val="200"/>
-              </a:spcAft>
-              <a:defRPr b="1" sz="1100">
-                <a:solidFill>
-                  <a:srgbClr val="FFFFFF"/>
-                </a:solidFill>
-              </a:defRPr>
-            </a:pPr>
-            <a:r>
-              <a:t>• Apache Hadoop HDFS</a:t>
-            </a:r>
-            <a:br/>
-            <a:r>
-              <a:t>  </a:t>
-            </a:r>
-            <a:r>
-              <a:rPr b="0" sz="1000">
-                <a:solidFill>
-                  <a:srgbClr val="94A3B8"/>
-                </a:solidFill>
-              </a:rPr>
-              <a:t>NameNode/DataNode architecture &amp; 64 KB block placement</a:t>
-            </a:r>
-          </a:p>
-          <a:p>
-            <a:pPr>
-              <a:spcAft>
-                <a:spcPts val="200"/>
-              </a:spcAft>
-              <a:defRPr b="1" sz="1100">
-                <a:solidFill>
-                  <a:srgbClr val="FFFFFF"/>
-                </a:solidFill>
-              </a:defRPr>
-            </a:pPr>
-            <a:r>
-              <a:t>• Dropbox Sync Engine</a:t>
-            </a:r>
-            <a:br/>
-            <a:r>
-              <a:t>  </a:t>
-            </a:r>
-            <a:r>
-              <a:rPr b="0" sz="1000">
-                <a:solidFill>
-                  <a:srgbClr val="94A3B8"/>
-                </a:solidFill>
-              </a:rPr>
-              <a:t>Chunk delta transfers, rsync algorithm &amp; conflicted copies</a:t>
-            </a:r>
-          </a:p>
-          <a:p>
-            <a:pPr>
-              <a:spcAft>
-                <a:spcPts val="200"/>
-              </a:spcAft>
-              <a:defRPr b="1" sz="1100">
-                <a:solidFill>
-                  <a:srgbClr val="FFFFFF"/>
-                </a:solidFill>
-              </a:defRPr>
-            </a:pPr>
-            <a:r>
-              <a:t>• Google Chubby / ZooKeeper</a:t>
-            </a:r>
-            <a:br/>
-            <a:r>
-              <a:t>  </a:t>
-            </a:r>
-            <a:r>
-              <a:rPr b="0" sz="1000">
-                <a:solidFill>
-                  <a:srgbClr val="94A3B8"/>
-                </a:solidFill>
-              </a:rPr>
-              <a:t>Named resource leases &amp; failover lease revocation</a:t>
-            </a:r>
-          </a:p>
-          <a:p>
-            <a:pPr>
-              <a:spcAft>
-                <a:spcPts val="200"/>
-              </a:spcAft>
-              <a:defRPr b="1" sz="1100">
-                <a:solidFill>
-                  <a:srgbClr val="FFFFFF"/>
-                </a:solidFill>
-              </a:defRPr>
-            </a:pPr>
-            <a:r>
-              <a:t>• Linux Cgroups &amp; POSIX</a:t>
-            </a:r>
-            <a:br/>
-            <a:r>
-              <a:t>  </a:t>
-            </a:r>
-            <a:r>
-              <a:rPr b="0" sz="1000">
-                <a:solidFill>
-                  <a:srgbClr val="94A3B8"/>
-                </a:solidFill>
-              </a:rPr>
-              <a:t>Memory quota limits &amp; zero-copy shared memory IPC</a:t>
+              <a:t>KEY TAKEAWAY: Clear separation between global coordination (Master) and distributed task execution (Workers).</a:t>
             </a:r>
           </a:p>
         </p:txBody>
@@ -5329,8 +4570,8 @@
         </p:nvSpPr>
         <p:spPr>
           <a:xfrm>
-            <a:off x="731520" y="365760"/>
-            <a:ext cx="10728655" cy="320040"/>
+            <a:off x="822960" y="365760"/>
+            <a:ext cx="10515600" cy="292608"/>
           </a:xfrm>
           <a:prstGeom prst="rect">
             <a:avLst/>
@@ -5344,14 +4585,14 @@
           <a:lstStyle/>
           <a:p>
             <a:pPr>
-              <a:defRPr sz="1000" b="1">
+              <a:defRPr sz="1100" b="1">
                 <a:solidFill>
                   <a:srgbClr val="38BDF8"/>
                 </a:solidFill>
               </a:defRPr>
             </a:pPr>
             <a:r>
-              <a:t>PROCESS MANAGEMENT &amp; SCHEDULING</a:t>
+              <a:t>MODULE 1: PROCESS MANAGEMENT</a:t>
             </a:r>
           </a:p>
         </p:txBody>
@@ -5364,8 +4605,8 @@
         </p:nvSpPr>
         <p:spPr>
           <a:xfrm>
-            <a:off x="731520" y="685800"/>
-            <a:ext cx="10728655" cy="594360"/>
+            <a:off x="822960" y="658368"/>
+            <a:ext cx="10515600" cy="502920"/>
           </a:xfrm>
           <a:prstGeom prst="rect">
             <a:avLst/>
@@ -5386,7 +4627,7 @@
               </a:defRPr>
             </a:pPr>
             <a:r>
-              <a:t>3. CPU Scheduling Algorithms &amp; Explainable Execution Trace</a:t>
+              <a:t>Distributed CPU Scheduling &amp; Process Control</a:t>
             </a:r>
           </a:p>
         </p:txBody>
@@ -5399,18 +4640,18 @@
         </p:nvSpPr>
         <p:spPr>
           <a:xfrm>
-            <a:off x="731520" y="1463040"/>
-            <a:ext cx="5120640" cy="4754880"/>
+            <a:off x="822960" y="1280160"/>
+            <a:ext cx="10545775" cy="4983480"/>
           </a:xfrm>
           <a:prstGeom prst="roundRect">
             <a:avLst/>
           </a:prstGeom>
           <a:solidFill>
-            <a:srgbClr val="162038"/>
+            <a:srgbClr val="141E34"/>
           </a:solidFill>
           <a:ln w="19050">
             <a:solidFill>
-              <a:srgbClr val="263554"/>
+              <a:srgbClr val="263758"/>
             </a:solidFill>
           </a:ln>
         </p:spPr>
@@ -5444,8 +4685,8 @@
         </p:nvSpPr>
         <p:spPr>
           <a:xfrm>
-            <a:off x="960120" y="1645920"/>
-            <a:ext cx="4663440" cy="411480"/>
+            <a:off x="1188720" y="1554480"/>
+            <a:ext cx="9814255" cy="365760"/>
           </a:xfrm>
           <a:prstGeom prst="rect">
             <a:avLst/>
@@ -5459,14 +4700,14 @@
           <a:lstStyle/>
           <a:p>
             <a:pPr>
-              <a:defRPr sz="1400" b="1">
-                <a:solidFill>
-                  <a:srgbClr val="38BDF8"/>
+              <a:defRPr sz="1300" b="1">
+                <a:solidFill>
+                  <a:srgbClr val="22C55E"/>
                 </a:solidFill>
               </a:defRPr>
             </a:pPr>
             <a:r>
-              <a:t>6 Implemented Scheduling Policies</a:t>
+              <a:t>OSDS Concepts: Process Control Block (PCB), Preemption, Time Slicing &amp; Starvation Prevention</a:t>
             </a:r>
           </a:p>
         </p:txBody>
@@ -5479,8 +4720,8 @@
         </p:nvSpPr>
         <p:spPr>
           <a:xfrm>
-            <a:off x="960120" y="2011680"/>
-            <a:ext cx="4663440" cy="3931920"/>
+            <a:off x="1188720" y="2057400"/>
+            <a:ext cx="9814255" cy="3977640"/>
           </a:xfrm>
           <a:prstGeom prst="rect">
             <a:avLst/>
@@ -5488,205 +4729,152 @@
           <a:noFill/>
         </p:spPr>
         <p:txBody>
-          <a:bodyPr wrap="square" lIns="0" tIns="0">
+          <a:bodyPr wrap="square" lIns="0" tIns="0" rIns="0" bIns="0">
             <a:spAutoFit/>
           </a:bodyPr>
           <a:lstStyle/>
           <a:p>
             <a:pPr>
+              <a:spcBef>
+                <a:spcPts val="200"/>
+              </a:spcBef>
               <a:spcAft>
+                <a:spcPts val="1400"/>
+              </a:spcAft>
+            </a:pPr>
+            <a:r>
+              <a:rPr b="1" sz="1600">
+                <a:solidFill>
+                  <a:srgbClr val="38BDF8"/>
+                </a:solidFill>
+              </a:rPr>
+              <a:t>•  Process Control Block (PCB): </a:t>
+            </a:r>
+            <a:r>
+              <a:rPr b="0" sz="1600">
+                <a:solidFill>
+                  <a:srgbClr val="E2E8F0"/>
+                </a:solidFill>
+              </a:rPr>
+              <a:t>NEXUS-OS assigns every job a full PCB tracking PID, state, arrival time, burst time, remaining time, priority, and assigned node.</a:t>
+            </a:r>
+          </a:p>
+          <a:p>
+            <a:pPr>
+              <a:spcBef>
                 <a:spcPts val="200"/>
+              </a:spcBef>
+              <a:spcAft>
+                <a:spcPts val="1400"/>
               </a:spcAft>
-              <a:defRPr b="1" sz="1100">
-                <a:solidFill>
-                  <a:srgbClr val="FFFFFF"/>
-                </a:solidFill>
-              </a:defRPr>
-            </a:pPr>
-            <a:r>
-              <a:t>• FCFS (First-Come, First-Served): </a:t>
-            </a:r>
-            <a:r>
-              <a:rPr b="0" sz="1050">
-                <a:solidFill>
-                  <a:srgbClr val="94A3B8"/>
-                </a:solidFill>
-              </a:rPr>
-              <a:t>Simple FIFO ready queue dispatch. Non-preemptive.</a:t>
-            </a:r>
-          </a:p>
-          <a:p>
-            <a:pPr>
+            </a:pPr>
+            <a:r>
+              <a:rPr b="1" sz="1600">
+                <a:solidFill>
+                  <a:srgbClr val="38BDF8"/>
+                </a:solidFill>
+              </a:rPr>
+              <a:t>•  Deterministic Task States: </a:t>
+            </a:r>
+            <a:r>
+              <a:rPr b="0" sz="1600">
+                <a:solidFill>
+                  <a:srgbClr val="E2E8F0"/>
+                </a:solidFill>
+              </a:rPr>
+              <a:t>Enforces strict finite-state-machine transitions: WAITING -&gt; RUNNING -&gt; COMPLETED (or FAILED on error).</a:t>
+            </a:r>
+          </a:p>
+          <a:p>
+            <a:pPr>
+              <a:spcBef>
+                <a:spcPts val="200"/>
+              </a:spcBef>
               <a:spcAft>
+                <a:spcPts val="1400"/>
+              </a:spcAft>
+            </a:pPr>
+            <a:r>
+              <a:rPr b="1" sz="1600">
+                <a:solidFill>
+                  <a:srgbClr val="38BDF8"/>
+                </a:solidFill>
+              </a:rPr>
+              <a:t>•  6 Implemented Policies: </a:t>
+            </a:r>
+            <a:r>
+              <a:rPr b="0" sz="1600">
+                <a:solidFill>
+                  <a:srgbClr val="E2E8F0"/>
+                </a:solidFill>
+              </a:rPr>
+              <a:t>Supports FCFS, Shortest Job First (SJF), Shortest Remaining Time First (SRTF), Round Robin (Quantum = 4), and Priority Scheduling.</a:t>
+            </a:r>
+          </a:p>
+          <a:p>
+            <a:pPr>
+              <a:spcBef>
                 <a:spcPts val="200"/>
+              </a:spcBef>
+              <a:spcAft>
+                <a:spcPts val="1400"/>
               </a:spcAft>
-              <a:defRPr b="1" sz="1100">
-                <a:solidFill>
-                  <a:srgbClr val="FFFFFF"/>
-                </a:solidFill>
-              </a:defRPr>
-            </a:pPr>
-            <a:r>
-              <a:t>• SJF (Shortest Job First): </a:t>
-            </a:r>
-            <a:r>
-              <a:rPr b="0" sz="1050">
-                <a:solidFill>
-                  <a:srgbClr val="94A3B8"/>
-                </a:solidFill>
-              </a:rPr>
-              <a:t>Dispatches lowest remaining burst. Minimizes average wait time.</a:t>
-            </a:r>
-          </a:p>
-          <a:p>
-            <a:pPr>
+            </a:pPr>
+            <a:r>
+              <a:rPr b="1" sz="1600">
+                <a:solidFill>
+                  <a:srgbClr val="38BDF8"/>
+                </a:solidFill>
+              </a:rPr>
+              <a:t>•  Priority with Aging: </a:t>
+            </a:r>
+            <a:r>
+              <a:rPr b="0" sz="1600">
+                <a:solidFill>
+                  <a:srgbClr val="E2E8F0"/>
+                </a:solidFill>
+              </a:rPr>
+              <a:t>Low-priority tasks automatically gain priority over time while waiting in queue, mathematically preventing process starvation under heavy load.</a:t>
+            </a:r>
+          </a:p>
+          <a:p>
+            <a:pPr>
+              <a:spcBef>
+                <a:spcPts val="200"/>
+              </a:spcBef>
               <a:spcAft>
-                <a:spcPts val="200"/>
+                <a:spcPts val="1400"/>
               </a:spcAft>
-              <a:defRPr b="1" sz="1100">
-                <a:solidFill>
-                  <a:srgbClr val="FFFFFF"/>
-                </a:solidFill>
-              </a:defRPr>
-            </a:pPr>
-            <a:r>
-              <a:t>• SRTF (Shortest Remaining Time First): </a:t>
-            </a:r>
-            <a:r>
-              <a:rPr b="0" sz="1050">
-                <a:solidFill>
-                  <a:srgbClr val="94A3B8"/>
-                </a:solidFill>
-              </a:rPr>
-              <a:t>Preemptive variant of SJF. Preempts when shorter job arrives.</a:t>
-            </a:r>
-          </a:p>
-          <a:p>
-            <a:pPr>
-              <a:spcAft>
-                <a:spcPts val="200"/>
-              </a:spcAft>
-              <a:defRPr b="1" sz="1100">
-                <a:solidFill>
-                  <a:srgbClr val="FFFFFF"/>
-                </a:solidFill>
-              </a:defRPr>
-            </a:pPr>
-            <a:r>
-              <a:t>• Priority Scheduling: </a:t>
-            </a:r>
-            <a:r>
-              <a:rPr b="0" sz="1050">
-                <a:solidFill>
-                  <a:srgbClr val="94A3B8"/>
-                </a:solidFill>
-              </a:rPr>
-              <a:t>Dispatches highest priority jobs. Susceptible to starvation.</a:t>
-            </a:r>
-          </a:p>
-          <a:p>
-            <a:pPr>
-              <a:spcAft>
-                <a:spcPts val="200"/>
-              </a:spcAft>
-              <a:defRPr b="1" sz="1100">
-                <a:solidFill>
-                  <a:srgbClr val="FFFFFF"/>
-                </a:solidFill>
-              </a:defRPr>
-            </a:pPr>
-            <a:r>
-              <a:t>• Priority + Aging: </a:t>
-            </a:r>
-            <a:r>
-              <a:rPr b="0" sz="1050">
-                <a:solidFill>
-                  <a:srgbClr val="94A3B8"/>
-                </a:solidFill>
-              </a:rPr>
-              <a:t>Increases priority over wait intervals. Starvation-free guarantee.</a:t>
-            </a:r>
-          </a:p>
-          <a:p>
-            <a:pPr>
-              <a:spcAft>
-                <a:spcPts val="200"/>
-              </a:spcAft>
-              <a:defRPr b="1" sz="1100">
-                <a:solidFill>
-                  <a:srgbClr val="FFFFFF"/>
-                </a:solidFill>
-              </a:defRPr>
-            </a:pPr>
-            <a:r>
-              <a:t>• Round Robin (RR): </a:t>
-            </a:r>
-            <a:r>
-              <a:rPr b="0" sz="1050">
-                <a:solidFill>
-                  <a:srgbClr val="94A3B8"/>
-                </a:solidFill>
-              </a:rPr>
-              <a:t>Preemptive time-slicing (Quantum Q=2). Fair CPU share across jobs.</a:t>
-            </a:r>
-          </a:p>
-        </p:txBody>
-      </p:sp>
-      <p:sp>
-        <p:nvSpPr>
-          <p:cNvPr id="8" name="Rounded Rectangle 7"/>
-          <p:cNvSpPr/>
-          <p:nvPr/>
-        </p:nvSpPr>
-        <p:spPr>
-          <a:xfrm>
-            <a:off x="6217920" y="1463040"/>
-            <a:ext cx="5242255" cy="4754880"/>
-          </a:xfrm>
-          <a:prstGeom prst="roundRect">
-            <a:avLst/>
-          </a:prstGeom>
-          <a:solidFill>
-            <a:srgbClr val="162038"/>
-          </a:solidFill>
-          <a:ln w="19050">
-            <a:solidFill>
-              <a:srgbClr val="263554"/>
-            </a:solidFill>
-          </a:ln>
-        </p:spPr>
-        <p:style>
-          <a:lnRef idx="1">
-            <a:schemeClr val="accent1"/>
-          </a:lnRef>
-          <a:fillRef idx="3">
-            <a:schemeClr val="accent1"/>
-          </a:fillRef>
-          <a:effectRef idx="2">
-            <a:schemeClr val="accent1"/>
-          </a:effectRef>
-          <a:fontRef idx="minor">
-            <a:schemeClr val="lt1"/>
-          </a:fontRef>
-        </p:style>
-        <p:txBody>
-          <a:bodyPr rtlCol="0" anchor="ctr"/>
-          <a:lstStyle/>
-          <a:p>
-            <a:pPr algn="ctr"/>
-          </a:p>
-        </p:txBody>
-      </p:sp>
-      <p:sp>
-        <p:nvSpPr>
-          <p:cNvPr id="9" name="TextBox 8"/>
+            </a:pPr>
+            <a:r>
+              <a:rPr b="1" sz="1600">
+                <a:solidFill>
+                  <a:srgbClr val="38BDF8"/>
+                </a:solidFill>
+              </a:rPr>
+              <a:t>•  Explainable Execution Trace: </a:t>
+            </a:r>
+            <a:r>
+              <a:rPr b="0" sz="1600">
+                <a:solidFill>
+                  <a:srgbClr val="E2E8F0"/>
+                </a:solidFill>
+              </a:rPr>
+              <a:t>A live dashboard audit log explains exactly why the scheduler picked each task (e.g. quantum expired, shorter remaining burst, priority promotion).</a:t>
+            </a:r>
+          </a:p>
+        </p:txBody>
+      </p:sp>
+      <p:sp>
+        <p:nvSpPr>
+          <p:cNvPr id="8" name="TextBox 7"/>
           <p:cNvSpPr txBox="1"/>
           <p:nvPr/>
         </p:nvSpPr>
         <p:spPr>
           <a:xfrm>
-            <a:off x="6446520" y="1645920"/>
-            <a:ext cx="4785055" cy="411480"/>
+            <a:off x="1188720" y="5669280"/>
+            <a:ext cx="9814255" cy="365760"/>
           </a:xfrm>
           <a:prstGeom prst="rect">
             <a:avLst/>
@@ -5700,145 +4888,14 @@
           <a:lstStyle/>
           <a:p>
             <a:pPr>
-              <a:defRPr sz="1400" b="1">
-                <a:solidFill>
-                  <a:srgbClr val="22C55E"/>
+              <a:defRPr sz="1200" b="1">
+                <a:solidFill>
+                  <a:srgbClr val="FBBF24"/>
                 </a:solidFill>
               </a:defRPr>
             </a:pPr>
             <a:r>
-              <a:t>PCB Table &amp; Explainable Execution Trace</a:t>
-            </a:r>
-          </a:p>
-        </p:txBody>
-      </p:sp>
-      <p:sp>
-        <p:nvSpPr>
-          <p:cNvPr id="10" name="TextBox 9"/>
-          <p:cNvSpPr txBox="1"/>
-          <p:nvPr/>
-        </p:nvSpPr>
-        <p:spPr>
-          <a:xfrm>
-            <a:off x="6446520" y="2011680"/>
-            <a:ext cx="4754880" cy="3931920"/>
-          </a:xfrm>
-          <a:prstGeom prst="rect">
-            <a:avLst/>
-          </a:prstGeom>
-          <a:noFill/>
-        </p:spPr>
-        <p:txBody>
-          <a:bodyPr wrap="square" lIns="0" tIns="0">
-            <a:spAutoFit/>
-          </a:bodyPr>
-          <a:lstStyle/>
-          <a:p>
-            <a:pPr>
-              <a:spcAft>
-                <a:spcPts val="400"/>
-              </a:spcAft>
-              <a:defRPr b="1" sz="1150">
-                <a:solidFill>
-                  <a:srgbClr val="FFFFFF"/>
-                </a:solidFill>
-              </a:defRPr>
-            </a:pPr>
-            <a:r>
-              <a:t>• Factual Task Lifecycle:</a:t>
-            </a:r>
-            <a:br/>
-            <a:r>
-              <a:t>  </a:t>
-            </a:r>
-            <a:r>
-              <a:rPr b="0" sz="1100">
-                <a:solidFill>
-                  <a:srgbClr val="94A3B8"/>
-                </a:solidFill>
-              </a:rPr>
-              <a:t>Tasks progress strictly through valid states: WAITING → RUNNING → COMPLETED / FAILED. Real node load increments on start, decrements on finish.</a:t>
-            </a:r>
-          </a:p>
-          <a:p>
-            <a:pPr>
-              <a:spcAft>
-                <a:spcPts val="400"/>
-              </a:spcAft>
-              <a:defRPr b="1" sz="1150">
-                <a:solidFill>
-                  <a:srgbClr val="FFFFFF"/>
-                </a:solidFill>
-              </a:defRPr>
-            </a:pPr>
-            <a:r>
-              <a:t>• Explainable Execution Trace ('Why this happened'):</a:t>
-            </a:r>
-            <a:br/>
-            <a:r>
-              <a:t>  </a:t>
-            </a:r>
-            <a:r>
-              <a:rPr b="0" sz="1100">
-                <a:solidFill>
-                  <a:srgbClr val="94A3B8"/>
-                </a:solidFill>
-              </a:rPr>
-              <a:t>Deterministic justification engine explaining why each job was selected (e.g. 'P1 ran first because arrival T=0 under FCFS', 'P2 preempted P1 under SRTF with remaining burst 3 &lt; 4').</a:t>
-            </a:r>
-          </a:p>
-          <a:p>
-            <a:pPr>
-              <a:spcAft>
-                <a:spcPts val="400"/>
-              </a:spcAft>
-              <a:defRPr b="1" sz="1150">
-                <a:solidFill>
-                  <a:srgbClr val="FFFFFF"/>
-                </a:solidFill>
-              </a:defRPr>
-            </a:pPr>
-            <a:r>
-              <a:t>• Live PCB Process Control Blocks:</a:t>
-            </a:r>
-            <a:br/>
-            <a:r>
-              <a:t>  </a:t>
-            </a:r>
-            <a:r>
-              <a:rPr b="0" sz="1100">
-                <a:solidFill>
-                  <a:srgbClr val="94A3B8"/>
-                </a:solidFill>
-              </a:rPr>
-              <a:t>Inspect PID, Assigned Node, Burst, Priority, State badge, and live control actions (Pause, Resume, Kill).</a:t>
-            </a:r>
-          </a:p>
-          <a:p>
-            <a:pPr>
-              <a:spcAft>
-                <a:spcPts val="400"/>
-              </a:spcAft>
-              <a:defRPr b="1" sz="1150">
-                <a:solidFill>
-                  <a:srgbClr val="FFFFFF"/>
-                </a:solidFill>
-              </a:defRPr>
-            </a:pPr>
-            <a:r>
-              <a:t>• Measured vs Predicted Metrics:</a:t>
-            </a:r>
-            <a:br/>
-            <a:r>
-              <a:t>  </a:t>
-            </a:r>
-            <a:r>
-              <a:rPr b="0" sz="1100">
-                <a:solidFill>
-                  <a:srgbClr val="94A3B8"/>
-                </a:solidFill>
-              </a:rPr>
-              <a:t>Evaluates theoretical simulator predictions against actual cluster execution timestamps with Real Gantt chart visualization.</a:t>
+              <a:t>KEY TAKEAWAY: Tasks transition through validated PCB states with starvation prevention and explainable scheduling.</a:t>
             </a:r>
           </a:p>
         </p:txBody>
@@ -5912,8 +4969,8 @@
         </p:nvSpPr>
         <p:spPr>
           <a:xfrm>
-            <a:off x="731520" y="365760"/>
-            <a:ext cx="10728655" cy="320040"/>
+            <a:off x="822960" y="365760"/>
+            <a:ext cx="10515600" cy="292608"/>
           </a:xfrm>
           <a:prstGeom prst="rect">
             <a:avLst/>
@@ -5927,14 +4984,14 @@
           <a:lstStyle/>
           <a:p>
             <a:pPr>
-              <a:defRPr sz="1000" b="1">
+              <a:defRPr sz="1100" b="1">
                 <a:solidFill>
                   <a:srgbClr val="38BDF8"/>
                 </a:solidFill>
               </a:defRPr>
             </a:pPr>
             <a:r>
-              <a:t>DEADLOCK AVOIDANCE &amp; RECOVERY</a:t>
+              <a:t>MODULE 2: RESOURCE ALLOCATION &amp; DEADLOCKS</a:t>
             </a:r>
           </a:p>
         </p:txBody>
@@ -5947,8 +5004,8 @@
         </p:nvSpPr>
         <p:spPr>
           <a:xfrm>
-            <a:off x="731520" y="685800"/>
-            <a:ext cx="10728655" cy="594360"/>
+            <a:off x="822960" y="658368"/>
+            <a:ext cx="10515600" cy="502920"/>
           </a:xfrm>
           <a:prstGeom prst="rect">
             <a:avLst/>
@@ -5969,7 +5026,7 @@
               </a:defRPr>
             </a:pPr>
             <a:r>
-              <a:t>4. Banker's Algorithm &amp; Wait-For Graph (WFG) Cycle Recovery</a:t>
+              <a:t>Banker's Algorithm &amp; Wait-For Graph Recovery</a:t>
             </a:r>
           </a:p>
         </p:txBody>
@@ -5982,18 +5039,18 @@
         </p:nvSpPr>
         <p:spPr>
           <a:xfrm>
-            <a:off x="731520" y="1463040"/>
-            <a:ext cx="5120640" cy="4754880"/>
+            <a:off x="822960" y="1280160"/>
+            <a:ext cx="10545775" cy="4983480"/>
           </a:xfrm>
           <a:prstGeom prst="roundRect">
             <a:avLst/>
           </a:prstGeom>
           <a:solidFill>
-            <a:srgbClr val="162038"/>
+            <a:srgbClr val="141E34"/>
           </a:solidFill>
           <a:ln w="19050">
             <a:solidFill>
-              <a:srgbClr val="263554"/>
+              <a:srgbClr val="263758"/>
             </a:solidFill>
           </a:ln>
         </p:spPr>
@@ -6027,8 +5084,8 @@
         </p:nvSpPr>
         <p:spPr>
           <a:xfrm>
-            <a:off x="960120" y="1645920"/>
-            <a:ext cx="4663440" cy="411480"/>
+            <a:off x="1188720" y="1554480"/>
+            <a:ext cx="9814255" cy="365760"/>
           </a:xfrm>
           <a:prstGeom prst="rect">
             <a:avLst/>
@@ -6042,14 +5099,14 @@
           <a:lstStyle/>
           <a:p>
             <a:pPr>
-              <a:defRPr sz="1400" b="1">
-                <a:solidFill>
-                  <a:srgbClr val="38BDF8"/>
+              <a:defRPr sz="1300" b="1">
+                <a:solidFill>
+                  <a:srgbClr val="22C55E"/>
                 </a:solidFill>
               </a:defRPr>
             </a:pPr>
             <a:r>
-              <a:t>Deadlock Avoidance: Banker's Algorithm</a:t>
+              <a:t>OSDS Concepts: Dijkstra's Banker's Algorithm, Circular Wait Detection &amp; Victim Preemption</a:t>
             </a:r>
           </a:p>
         </p:txBody>
@@ -6062,8 +5119,8 @@
         </p:nvSpPr>
         <p:spPr>
           <a:xfrm>
-            <a:off x="960120" y="2011680"/>
-            <a:ext cx="4663440" cy="3931920"/>
+            <a:off x="1188720" y="2057400"/>
+            <a:ext cx="9814255" cy="3977640"/>
           </a:xfrm>
           <a:prstGeom prst="rect">
             <a:avLst/>
@@ -6071,175 +5128,152 @@
           <a:noFill/>
         </p:spPr>
         <p:txBody>
-          <a:bodyPr wrap="square" lIns="0" tIns="0">
+          <a:bodyPr wrap="square" lIns="0" tIns="0" rIns="0" bIns="0">
             <a:spAutoFit/>
           </a:bodyPr>
           <a:lstStyle/>
           <a:p>
             <a:pPr>
+              <a:spcBef>
+                <a:spcPts val="200"/>
+              </a:spcBef>
               <a:spcAft>
-                <a:spcPts val="400"/>
+                <a:spcPts val="1400"/>
               </a:spcAft>
-              <a:defRPr b="1" sz="1150">
-                <a:solidFill>
-                  <a:srgbClr val="FFFFFF"/>
-                </a:solidFill>
-              </a:defRPr>
-            </a:pPr>
-            <a:r>
-              <a:t>• Dijkstra's Admission Control:</a:t>
-            </a:r>
-            <a:br/>
-            <a:r>
-              <a:t>  </a:t>
-            </a:r>
-            <a:r>
-              <a:rPr b="0" sz="1100">
-                <a:solidFill>
-                  <a:srgbClr val="94A3B8"/>
-                </a:solidFill>
-              </a:rPr>
-              <a:t>Pre-allocates model resources (R1: CPU Cores, R2: Memory Frames, R3: I/O Channels) safely.</a:t>
-            </a:r>
-          </a:p>
-          <a:p>
-            <a:pPr>
+            </a:pPr>
+            <a:r>
+              <a:rPr b="1" sz="1600">
+                <a:solidFill>
+                  <a:srgbClr val="38BDF8"/>
+                </a:solidFill>
+              </a:rPr>
+              <a:t>•  Multi-Resource Tracking: </a:t>
+            </a:r>
+            <a:r>
+              <a:rPr b="0" sz="1600">
+                <a:solidFill>
+                  <a:srgbClr val="E2E8F0"/>
+                </a:solidFill>
+              </a:rPr>
+              <a:t>Coordinates shared cluster hardware across three distinct resource vectors: CPU Cores, Memory Blocks, and GPU Slices.</a:t>
+            </a:r>
+          </a:p>
+          <a:p>
+            <a:pPr>
+              <a:spcBef>
+                <a:spcPts val="200"/>
+              </a:spcBef>
               <a:spcAft>
-                <a:spcPts val="400"/>
+                <a:spcPts val="1400"/>
               </a:spcAft>
-              <a:defRPr b="1" sz="1150">
-                <a:solidFill>
-                  <a:srgbClr val="FFFFFF"/>
-                </a:solidFill>
-              </a:defRPr>
-            </a:pPr>
-            <a:r>
-              <a:t>• Safety Criterion Check:</a:t>
-            </a:r>
-            <a:br/>
-            <a:r>
-              <a:t>  </a:t>
-            </a:r>
-            <a:r>
-              <a:rPr b="0" sz="1100">
-                <a:solidFill>
-                  <a:srgbClr val="94A3B8"/>
-                </a:solidFill>
-              </a:rPr>
-              <a:t>Need[i][j] = Max[i][j] - Allocation[i][j]. Requests evaluated against Work and Available vectors.</a:t>
-            </a:r>
-          </a:p>
-          <a:p>
-            <a:pPr>
+            </a:pPr>
+            <a:r>
+              <a:rPr b="1" sz="1600">
+                <a:solidFill>
+                  <a:srgbClr val="38BDF8"/>
+                </a:solidFill>
+              </a:rPr>
+              <a:t>•  Banker's Algorithm (Avoidance): </a:t>
+            </a:r>
+            <a:r>
+              <a:rPr b="0" sz="1600">
+                <a:solidFill>
+                  <a:srgbClr val="E2E8F0"/>
+                </a:solidFill>
+              </a:rPr>
+              <a:t>Before allocating requested resources, the Coordinator calculates whether a safe sequence exists using the condition Need &lt;= Available.</a:t>
+            </a:r>
+          </a:p>
+          <a:p>
+            <a:pPr>
+              <a:spcBef>
+                <a:spcPts val="200"/>
+              </a:spcBef>
               <a:spcAft>
-                <a:spcPts val="400"/>
+                <a:spcPts val="1400"/>
               </a:spcAft>
-              <a:defRPr b="1" sz="1150">
-                <a:solidFill>
-                  <a:srgbClr val="FFFFFF"/>
-                </a:solidFill>
-              </a:defRPr>
-            </a:pPr>
-            <a:r>
-              <a:t>• Safe vs Unsafe State Distinction:</a:t>
-            </a:r>
-            <a:br/>
-            <a:r>
-              <a:t>  </a:t>
-            </a:r>
-            <a:r>
-              <a:rPr b="0" sz="1100">
-                <a:solidFill>
-                  <a:srgbClr val="94A3B8"/>
-                </a:solidFill>
-              </a:rPr>
-              <a:t>If granting a request preserves a safe sequence (e.g. P1 → P3 → P4 → P0 → P2), it is GRANTED. If granting leaves insufficient resources, it is DENIED.</a:t>
-            </a:r>
-          </a:p>
-          <a:p>
-            <a:pPr>
+            </a:pPr>
+            <a:r>
+              <a:rPr b="1" sz="1600">
+                <a:solidFill>
+                  <a:srgbClr val="38BDF8"/>
+                </a:solidFill>
+              </a:rPr>
+              <a:t>•  Unsafe Request Handling: </a:t>
+            </a:r>
+            <a:r>
+              <a:rPr b="0" sz="1600">
+                <a:solidFill>
+                  <a:srgbClr val="E2E8F0"/>
+                </a:solidFill>
+              </a:rPr>
+              <a:t>If granting a request could lead to a deadlock, the allocator safely rejects or defers the request to preserve system stability.</a:t>
+            </a:r>
+          </a:p>
+          <a:p>
+            <a:pPr>
+              <a:spcBef>
+                <a:spcPts val="200"/>
+              </a:spcBef>
               <a:spcAft>
-                <a:spcPts val="400"/>
+                <a:spcPts val="1400"/>
               </a:spcAft>
-              <a:defRPr b="1" sz="1150">
-                <a:solidFill>
-                  <a:srgbClr val="FFFFFF"/>
-                </a:solidFill>
-              </a:defRPr>
-            </a:pPr>
-            <a:r>
-              <a:t>• Live Matrix Visualization:</a:t>
-            </a:r>
-            <a:br/>
-            <a:r>
-              <a:t>  </a:t>
-            </a:r>
-            <a:r>
-              <a:rPr b="0" sz="1100">
-                <a:solidFill>
-                  <a:srgbClr val="94A3B8"/>
-                </a:solidFill>
-              </a:rPr>
-              <a:t>Interactive UI displays Allocation, Max, Need matrices, and Available Vector with textbook initial state.</a:t>
-            </a:r>
-          </a:p>
-        </p:txBody>
-      </p:sp>
-      <p:sp>
-        <p:nvSpPr>
-          <p:cNvPr id="8" name="Rounded Rectangle 7"/>
-          <p:cNvSpPr/>
-          <p:nvPr/>
-        </p:nvSpPr>
-        <p:spPr>
-          <a:xfrm>
-            <a:off x="6217920" y="1463040"/>
-            <a:ext cx="5242255" cy="4754880"/>
-          </a:xfrm>
-          <a:prstGeom prst="roundRect">
-            <a:avLst/>
-          </a:prstGeom>
-          <a:solidFill>
-            <a:srgbClr val="162038"/>
-          </a:solidFill>
-          <a:ln w="19050">
-            <a:solidFill>
-              <a:srgbClr val="263554"/>
-            </a:solidFill>
-          </a:ln>
-        </p:spPr>
-        <p:style>
-          <a:lnRef idx="1">
-            <a:schemeClr val="accent1"/>
-          </a:lnRef>
-          <a:fillRef idx="3">
-            <a:schemeClr val="accent1"/>
-          </a:fillRef>
-          <a:effectRef idx="2">
-            <a:schemeClr val="accent1"/>
-          </a:effectRef>
-          <a:fontRef idx="minor">
-            <a:schemeClr val="lt1"/>
-          </a:fontRef>
-        </p:style>
-        <p:txBody>
-          <a:bodyPr rtlCol="0" anchor="ctr"/>
-          <a:lstStyle/>
-          <a:p>
-            <a:pPr algn="ctr"/>
-          </a:p>
-        </p:txBody>
-      </p:sp>
-      <p:sp>
-        <p:nvSpPr>
-          <p:cNvPr id="9" name="TextBox 8"/>
+            </a:pPr>
+            <a:r>
+              <a:rPr b="1" sz="1600">
+                <a:solidFill>
+                  <a:srgbClr val="38BDF8"/>
+                </a:solidFill>
+              </a:rPr>
+              <a:t>•  Wait-For Graph (Detection): </a:t>
+            </a:r>
+            <a:r>
+              <a:rPr b="0" sz="1600">
+                <a:solidFill>
+                  <a:srgbClr val="E2E8F0"/>
+                </a:solidFill>
+              </a:rPr>
+              <a:t>Maintains a live directed graph where nodes represent processes and directed edges represent blocked resource dependencies.</a:t>
+            </a:r>
+          </a:p>
+          <a:p>
+            <a:pPr>
+              <a:spcBef>
+                <a:spcPts val="200"/>
+              </a:spcBef>
+              <a:spcAft>
+                <a:spcPts val="1400"/>
+              </a:spcAft>
+            </a:pPr>
+            <a:r>
+              <a:rPr b="1" sz="1600">
+                <a:solidFill>
+                  <a:srgbClr val="38BDF8"/>
+                </a:solidFill>
+              </a:rPr>
+              <a:t>•  Cycle Detection &amp; Recovery: </a:t>
+            </a:r>
+            <a:r>
+              <a:rPr b="0" sz="1600">
+                <a:solidFill>
+                  <a:srgbClr val="E2E8F0"/>
+                </a:solidFill>
+              </a:rPr>
+              <a:t>Runs depth-first search to detect circular wait cycles, automatically terminates the optimal victim process, and reclaims resources to break the deadlock.</a:t>
+            </a:r>
+          </a:p>
+        </p:txBody>
+      </p:sp>
+      <p:sp>
+        <p:nvSpPr>
+          <p:cNvPr id="8" name="TextBox 7"/>
           <p:cNvSpPr txBox="1"/>
           <p:nvPr/>
         </p:nvSpPr>
         <p:spPr>
           <a:xfrm>
-            <a:off x="6446520" y="1645920"/>
-            <a:ext cx="4785055" cy="411480"/>
+            <a:off x="1188720" y="5669280"/>
+            <a:ext cx="9814255" cy="365760"/>
           </a:xfrm>
           <a:prstGeom prst="rect">
             <a:avLst/>
@@ -6253,145 +5287,14 @@
           <a:lstStyle/>
           <a:p>
             <a:pPr>
-              <a:defRPr sz="1400" b="1">
-                <a:solidFill>
-                  <a:srgbClr val="EF4444"/>
+              <a:defRPr sz="1200" b="1">
+                <a:solidFill>
+                  <a:srgbClr val="FBBF24"/>
                 </a:solidFill>
               </a:defRPr>
             </a:pPr>
             <a:r>
-              <a:t>Deadlock Detection &amp; Victim Selection</a:t>
-            </a:r>
-          </a:p>
-        </p:txBody>
-      </p:sp>
-      <p:sp>
-        <p:nvSpPr>
-          <p:cNvPr id="10" name="TextBox 9"/>
-          <p:cNvSpPr txBox="1"/>
-          <p:nvPr/>
-        </p:nvSpPr>
-        <p:spPr>
-          <a:xfrm>
-            <a:off x="6446520" y="2011680"/>
-            <a:ext cx="4754880" cy="3931920"/>
-          </a:xfrm>
-          <a:prstGeom prst="rect">
-            <a:avLst/>
-          </a:prstGeom>
-          <a:noFill/>
-        </p:spPr>
-        <p:txBody>
-          <a:bodyPr wrap="square" lIns="0" tIns="0">
-            <a:spAutoFit/>
-          </a:bodyPr>
-          <a:lstStyle/>
-          <a:p>
-            <a:pPr>
-              <a:spcAft>
-                <a:spcPts val="400"/>
-              </a:spcAft>
-              <a:defRPr b="1" sz="1150">
-                <a:solidFill>
-                  <a:srgbClr val="FFFFFF"/>
-                </a:solidFill>
-              </a:defRPr>
-            </a:pPr>
-            <a:r>
-              <a:t>• Directed Wait-For Graph (WFG):</a:t>
-            </a:r>
-            <a:br/>
-            <a:r>
-              <a:t>  </a:t>
-            </a:r>
-            <a:r>
-              <a:rPr b="0" sz="1100">
-                <a:solidFill>
-                  <a:srgbClr val="94A3B8"/>
-                </a:solidFill>
-              </a:rPr>
-              <a:t>Directed edge Pi → Pj indicates Pi is blocked waiting for a resource or lock held by Pj. Cycles signify deadlock.</a:t>
-            </a:r>
-          </a:p>
-          <a:p>
-            <a:pPr>
-              <a:spcAft>
-                <a:spcPts val="400"/>
-              </a:spcAft>
-              <a:defRPr b="1" sz="1150">
-                <a:solidFill>
-                  <a:srgbClr val="FFFFFF"/>
-                </a:solidFill>
-              </a:defRPr>
-            </a:pPr>
-            <a:r>
-              <a:t>• Cycle Detection Engine:</a:t>
-            </a:r>
-            <a:br/>
-            <a:r>
-              <a:t>  </a:t>
-            </a:r>
-            <a:r>
-              <a:rPr b="0" sz="1100">
-                <a:solidFill>
-                  <a:srgbClr val="94A3B8"/>
-                </a:solidFill>
-              </a:rPr>
-              <a:t>Detects Circular Wait (P1 → P2 → P3 → P1) and dual independent cycles instantly.</a:t>
-            </a:r>
-          </a:p>
-          <a:p>
-            <a:pPr>
-              <a:spcAft>
-                <a:spcPts val="400"/>
-              </a:spcAft>
-              <a:defRPr b="1" sz="1150">
-                <a:solidFill>
-                  <a:srgbClr val="FFFFFF"/>
-                </a:solidFill>
-              </a:defRPr>
-            </a:pPr>
-            <a:r>
-              <a:t>• Victim Selection Policies:</a:t>
-            </a:r>
-            <a:br/>
-            <a:r>
-              <a:t>  </a:t>
-            </a:r>
-            <a:r>
-              <a:rPr b="0" sz="1100">
-                <a:solidFill>
-                  <a:srgbClr val="94A3B8"/>
-                </a:solidFill>
-              </a:rPr>
-              <a:t>Picks optimal victim process according to 3 resource reclamation policies: Youngest Process, Least Work Done, Lowest Priority.</a:t>
-            </a:r>
-          </a:p>
-          <a:p>
-            <a:pPr>
-              <a:spcAft>
-                <a:spcPts val="400"/>
-              </a:spcAft>
-              <a:defRPr b="1" sz="1150">
-                <a:solidFill>
-                  <a:srgbClr val="FFFFFF"/>
-                </a:solidFill>
-              </a:defRPr>
-            </a:pPr>
-            <a:r>
-              <a:t>• Cycle Breaking &amp; Recovery:</a:t>
-            </a:r>
-            <a:br/>
-            <a:r>
-              <a:t>  </a:t>
-            </a:r>
-            <a:r>
-              <a:rPr b="0" sz="1100">
-                <a:solidFill>
-                  <a:srgbClr val="94A3B8"/>
-                </a:solidFill>
-              </a:rPr>
-              <a:t>Terminating victim immediately releases dependencies, transitions WFG to safe green acyclic state, and logs recovery with Lamport timestamp.</a:t>
+              <a:t>KEY TAKEAWAY: Combines proactive deadlock avoidance (Banker's) with reactive cycle detection and recovery (WFG).</a:t>
             </a:r>
           </a:p>
         </p:txBody>
@@ -6465,8 +5368,8 @@
         </p:nvSpPr>
         <p:spPr>
           <a:xfrm>
-            <a:off x="731520" y="365760"/>
-            <a:ext cx="10728655" cy="320040"/>
+            <a:off x="822960" y="365760"/>
+            <a:ext cx="10515600" cy="292608"/>
           </a:xfrm>
           <a:prstGeom prst="rect">
             <a:avLst/>
@@ -6480,14 +5383,14 @@
           <a:lstStyle/>
           <a:p>
             <a:pPr>
-              <a:defRPr sz="1000" b="1">
+              <a:defRPr sz="1100" b="1">
                 <a:solidFill>
                   <a:srgbClr val="38BDF8"/>
                 </a:solidFill>
               </a:defRPr>
             </a:pPr>
             <a:r>
-              <a:t>MEMORY &amp; PAGING</a:t>
+              <a:t>MODULE 3: MEMORY MANAGEMENT</a:t>
             </a:r>
           </a:p>
         </p:txBody>
@@ -6500,8 +5403,8 @@
         </p:nvSpPr>
         <p:spPr>
           <a:xfrm>
-            <a:off x="731520" y="685800"/>
-            <a:ext cx="10728655" cy="594360"/>
+            <a:off x="822960" y="658368"/>
+            <a:ext cx="10515600" cy="502920"/>
           </a:xfrm>
           <a:prstGeom prst="rect">
             <a:avLst/>
@@ -6522,7 +5425,7 @@
               </a:defRPr>
             </a:pPr>
             <a:r>
-              <a:t>5. Page Replacement Simulator &amp; Belady's Anomaly Demonstration</a:t>
+              <a:t>Virtual Paging Subsystem &amp; Belady's Anomaly</a:t>
             </a:r>
           </a:p>
         </p:txBody>
@@ -6535,18 +5438,18 @@
         </p:nvSpPr>
         <p:spPr>
           <a:xfrm>
-            <a:off x="731520" y="1463040"/>
-            <a:ext cx="5120640" cy="4754880"/>
+            <a:off x="822960" y="1280160"/>
+            <a:ext cx="10545775" cy="4983480"/>
           </a:xfrm>
           <a:prstGeom prst="roundRect">
             <a:avLst/>
           </a:prstGeom>
           <a:solidFill>
-            <a:srgbClr val="162038"/>
+            <a:srgbClr val="141E34"/>
           </a:solidFill>
           <a:ln w="19050">
             <a:solidFill>
-              <a:srgbClr val="263554"/>
+              <a:srgbClr val="263758"/>
             </a:solidFill>
           </a:ln>
         </p:spPr>
@@ -6580,8 +5483,8 @@
         </p:nvSpPr>
         <p:spPr>
           <a:xfrm>
-            <a:off x="960120" y="1645920"/>
-            <a:ext cx="4663440" cy="411480"/>
+            <a:off x="1188720" y="1554480"/>
+            <a:ext cx="9814255" cy="365760"/>
           </a:xfrm>
           <a:prstGeom prst="rect">
             <a:avLst/>
@@ -6595,14 +5498,14 @@
           <a:lstStyle/>
           <a:p>
             <a:pPr>
-              <a:defRPr sz="1400" b="1">
-                <a:solidFill>
-                  <a:srgbClr val="38BDF8"/>
+              <a:defRPr sz="1300" b="1">
+                <a:solidFill>
+                  <a:srgbClr val="22C55E"/>
                 </a:solidFill>
               </a:defRPr>
             </a:pPr>
             <a:r>
-              <a:t>Page Replacement Policies</a:t>
+              <a:t>OSDS Concepts: Virtual Memory, Page Frame Allocation, FIFO vs LRU &amp; Belady's Anomaly Proof</a:t>
             </a:r>
           </a:p>
         </p:txBody>
@@ -6615,8 +5518,8 @@
         </p:nvSpPr>
         <p:spPr>
           <a:xfrm>
-            <a:off x="960120" y="2011680"/>
-            <a:ext cx="4663440" cy="3931920"/>
+            <a:off x="1188720" y="2057400"/>
+            <a:ext cx="9814255" cy="3977640"/>
           </a:xfrm>
           <a:prstGeom prst="rect">
             <a:avLst/>
@@ -6624,175 +5527,152 @@
           <a:noFill/>
         </p:spPr>
         <p:txBody>
-          <a:bodyPr wrap="square" lIns="0" tIns="0">
+          <a:bodyPr wrap="square" lIns="0" tIns="0" rIns="0" bIns="0">
             <a:spAutoFit/>
           </a:bodyPr>
           <a:lstStyle/>
           <a:p>
             <a:pPr>
+              <a:spcBef>
+                <a:spcPts val="200"/>
+              </a:spcBef>
               <a:spcAft>
-                <a:spcPts val="400"/>
+                <a:spcPts val="1400"/>
               </a:spcAft>
-              <a:defRPr b="1" sz="1150">
-                <a:solidFill>
-                  <a:srgbClr val="FFFFFF"/>
-                </a:solidFill>
-              </a:defRPr>
-            </a:pPr>
-            <a:r>
-              <a:t>• FIFO (First-In, First-Out):</a:t>
-            </a:r>
-            <a:br/>
-            <a:r>
-              <a:t>  </a:t>
-            </a:r>
-            <a:r>
-              <a:rPr b="0" sz="1100">
-                <a:solidFill>
-                  <a:srgbClr val="94A3B8"/>
-                </a:solidFill>
-              </a:rPr>
-              <a:t>Evicts the oldest page brought into physical memory frames. Simple queue implementation.</a:t>
-            </a:r>
-          </a:p>
-          <a:p>
-            <a:pPr>
+            </a:pPr>
+            <a:r>
+              <a:rPr b="1" sz="1600">
+                <a:solidFill>
+                  <a:srgbClr val="38BDF8"/>
+                </a:solidFill>
+              </a:rPr>
+              <a:t>•  Virtual Paging Simulation: </a:t>
+            </a:r>
+            <a:r>
+              <a:rPr b="0" sz="1600">
+                <a:solidFill>
+                  <a:srgbClr val="E2E8F0"/>
+                </a:solidFill>
+              </a:rPr>
+              <a:t>Models memory frame allocations (3, 4, or 5 physical frames) against incoming page reference strings submitted by cluster tasks.</a:t>
+            </a:r>
+          </a:p>
+          <a:p>
+            <a:pPr>
+              <a:spcBef>
+                <a:spcPts val="200"/>
+              </a:spcBef>
               <a:spcAft>
-                <a:spcPts val="400"/>
+                <a:spcPts val="1400"/>
               </a:spcAft>
-              <a:defRPr b="1" sz="1150">
-                <a:solidFill>
-                  <a:srgbClr val="FFFFFF"/>
-                </a:solidFill>
-              </a:defRPr>
-            </a:pPr>
-            <a:r>
-              <a:t>• LRU (Least Recently Used):</a:t>
-            </a:r>
-            <a:br/>
-            <a:r>
-              <a:t>  </a:t>
-            </a:r>
-            <a:r>
-              <a:rPr b="0" sz="1100">
-                <a:solidFill>
-                  <a:srgbClr val="94A3B8"/>
-                </a:solidFill>
-              </a:rPr>
-              <a:t>Evicts the page unused for the longest interval. Approximates optimal replacement using temporal locality.</a:t>
-            </a:r>
-          </a:p>
-          <a:p>
-            <a:pPr>
+            </a:pPr>
+            <a:r>
+              <a:rPr b="1" sz="1600">
+                <a:solidFill>
+                  <a:srgbClr val="38BDF8"/>
+                </a:solidFill>
+              </a:rPr>
+              <a:t>•  Page Replacement Policies: </a:t>
+            </a:r>
+            <a:r>
+              <a:rPr b="0" sz="1600">
+                <a:solidFill>
+                  <a:srgbClr val="E2E8F0"/>
+                </a:solidFill>
+              </a:rPr>
+              <a:t>Implements First-In First-Out (FIFO), Least Recently Used (LRU), and Optimal Page Replacement (Belady's Min Algorithm) for benchmark comparison.</a:t>
+            </a:r>
+          </a:p>
+          <a:p>
+            <a:pPr>
+              <a:spcBef>
+                <a:spcPts val="200"/>
+              </a:spcBef>
               <a:spcAft>
-                <a:spcPts val="400"/>
+                <a:spcPts val="1400"/>
               </a:spcAft>
-              <a:defRPr b="1" sz="1150">
-                <a:solidFill>
-                  <a:srgbClr val="FFFFFF"/>
-                </a:solidFill>
-              </a:defRPr>
-            </a:pPr>
-            <a:r>
-              <a:t>• Optimal (OPT / MIN):</a:t>
-            </a:r>
-            <a:br/>
-            <a:r>
-              <a:t>  </a:t>
-            </a:r>
-            <a:r>
-              <a:rPr b="0" sz="1100">
-                <a:solidFill>
-                  <a:srgbClr val="94A3B8"/>
-                </a:solidFill>
-              </a:rPr>
-              <a:t>Evicts the page that will not be accessed for the longest time in future. Serves as theoretical performance upper bound.</a:t>
-            </a:r>
-          </a:p>
-          <a:p>
-            <a:pPr>
+            </a:pPr>
+            <a:r>
+              <a:rPr b="1" sz="1600">
+                <a:solidFill>
+                  <a:srgbClr val="38BDF8"/>
+                </a:solidFill>
+              </a:rPr>
+              <a:t>•  Belady's Anomaly Proof: </a:t>
+            </a:r>
+            <a:r>
+              <a:rPr b="0" sz="1600">
+                <a:solidFill>
+                  <a:srgbClr val="E2E8F0"/>
+                </a:solidFill>
+              </a:rPr>
+              <a:t>Our dashboard interactively demonstrates that giving FIFO more memory frames (increasing from 3 to 4) can paradoxically increase page faults from 9 to 10.</a:t>
+            </a:r>
+          </a:p>
+          <a:p>
+            <a:pPr>
+              <a:spcBef>
+                <a:spcPts val="200"/>
+              </a:spcBef>
               <a:spcAft>
-                <a:spcPts val="400"/>
+                <a:spcPts val="1400"/>
               </a:spcAft>
-              <a:defRPr b="1" sz="1150">
-                <a:solidFill>
-                  <a:srgbClr val="FFFFFF"/>
-                </a:solidFill>
-              </a:defRPr>
-            </a:pPr>
-            <a:r>
-              <a:t>• Step-by-Step Frame Inspection:</a:t>
-            </a:r>
-            <a:br/>
-            <a:r>
-              <a:t>  </a:t>
-            </a:r>
-            <a:r>
-              <a:rPr b="0" sz="1100">
-                <a:solidFill>
-                  <a:srgbClr val="94A3B8"/>
-                </a:solidFill>
-              </a:rPr>
-              <a:t>Visual table displays exact resident pages per step, marking page hits (green) and page faults (red).</a:t>
-            </a:r>
-          </a:p>
-        </p:txBody>
-      </p:sp>
-      <p:sp>
-        <p:nvSpPr>
-          <p:cNvPr id="8" name="Rounded Rectangle 7"/>
-          <p:cNvSpPr/>
-          <p:nvPr/>
-        </p:nvSpPr>
-        <p:spPr>
-          <a:xfrm>
-            <a:off x="6217920" y="1463040"/>
-            <a:ext cx="5242255" cy="4754880"/>
-          </a:xfrm>
-          <a:prstGeom prst="roundRect">
-            <a:avLst/>
-          </a:prstGeom>
-          <a:solidFill>
-            <a:srgbClr val="162038"/>
-          </a:solidFill>
-          <a:ln w="19050">
-            <a:solidFill>
-              <a:srgbClr val="263554"/>
-            </a:solidFill>
-          </a:ln>
-        </p:spPr>
-        <p:style>
-          <a:lnRef idx="1">
-            <a:schemeClr val="accent1"/>
-          </a:lnRef>
-          <a:fillRef idx="3">
-            <a:schemeClr val="accent1"/>
-          </a:fillRef>
-          <a:effectRef idx="2">
-            <a:schemeClr val="accent1"/>
-          </a:effectRef>
-          <a:fontRef idx="minor">
-            <a:schemeClr val="lt1"/>
-          </a:fontRef>
-        </p:style>
-        <p:txBody>
-          <a:bodyPr rtlCol="0" anchor="ctr"/>
-          <a:lstStyle/>
-          <a:p>
-            <a:pPr algn="ctr"/>
-          </a:p>
-        </p:txBody>
-      </p:sp>
-      <p:sp>
-        <p:nvSpPr>
-          <p:cNvPr id="9" name="TextBox 8"/>
+            </a:pPr>
+            <a:r>
+              <a:rPr b="1" sz="1600">
+                <a:solidFill>
+                  <a:srgbClr val="38BDF8"/>
+                </a:solidFill>
+              </a:rPr>
+              <a:t>•  Stack Algorithm Comparison: </a:t>
+            </a:r>
+            <a:r>
+              <a:rPr b="0" sz="1600">
+                <a:solidFill>
+                  <a:srgbClr val="E2E8F0"/>
+                </a:solidFill>
+              </a:rPr>
+              <a:t>Proves why LRU never experiences Belady's Anomaly because its set of resident pages in m frames is always a strict subset of m+1 frames.</a:t>
+            </a:r>
+          </a:p>
+          <a:p>
+            <a:pPr>
+              <a:spcBef>
+                <a:spcPts val="200"/>
+              </a:spcBef>
+              <a:spcAft>
+                <a:spcPts val="1400"/>
+              </a:spcAft>
+            </a:pPr>
+            <a:r>
+              <a:rPr b="1" sz="1600">
+                <a:solidFill>
+                  <a:srgbClr val="38BDF8"/>
+                </a:solidFill>
+              </a:rPr>
+              <a:t>•  Lab Cluster Impact: </a:t>
+            </a:r>
+            <a:r>
+              <a:rPr b="0" sz="1600">
+                <a:solidFill>
+                  <a:srgbClr val="E2E8F0"/>
+                </a:solidFill>
+              </a:rPr>
+              <a:t>Demonstrates the practical necessity of LRU caching to prevent thrashing and minimize expensive disk swap operations across cluster nodes.</a:t>
+            </a:r>
+          </a:p>
+        </p:txBody>
+      </p:sp>
+      <p:sp>
+        <p:nvSpPr>
+          <p:cNvPr id="8" name="TextBox 7"/>
           <p:cNvSpPr txBox="1"/>
           <p:nvPr/>
         </p:nvSpPr>
         <p:spPr>
           <a:xfrm>
-            <a:off x="6446520" y="1645920"/>
-            <a:ext cx="4785055" cy="411480"/>
+            <a:off x="1188720" y="5669280"/>
+            <a:ext cx="9814255" cy="365760"/>
           </a:xfrm>
           <a:prstGeom prst="rect">
             <a:avLst/>
@@ -6806,145 +5686,14 @@
           <a:lstStyle/>
           <a:p>
             <a:pPr>
-              <a:defRPr sz="1400" b="1">
+              <a:defRPr sz="1200" b="1">
                 <a:solidFill>
                   <a:srgbClr val="FBBF24"/>
                 </a:solidFill>
               </a:defRPr>
             </a:pPr>
             <a:r>
-              <a:t>Belady's Anomaly &amp; Distributed Block Cache</a:t>
-            </a:r>
-          </a:p>
-        </p:txBody>
-      </p:sp>
-      <p:sp>
-        <p:nvSpPr>
-          <p:cNvPr id="10" name="TextBox 9"/>
-          <p:cNvSpPr txBox="1"/>
-          <p:nvPr/>
-        </p:nvSpPr>
-        <p:spPr>
-          <a:xfrm>
-            <a:off x="6446520" y="2011680"/>
-            <a:ext cx="4754880" cy="3931920"/>
-          </a:xfrm>
-          <a:prstGeom prst="rect">
-            <a:avLst/>
-          </a:prstGeom>
-          <a:noFill/>
-        </p:spPr>
-        <p:txBody>
-          <a:bodyPr wrap="square" lIns="0" tIns="0">
-            <a:spAutoFit/>
-          </a:bodyPr>
-          <a:lstStyle/>
-          <a:p>
-            <a:pPr>
-              <a:spcAft>
-                <a:spcPts val="400"/>
-              </a:spcAft>
-              <a:defRPr b="1" sz="1150">
-                <a:solidFill>
-                  <a:srgbClr val="FFFFFF"/>
-                </a:solidFill>
-              </a:defRPr>
-            </a:pPr>
-            <a:r>
-              <a:t>• Belady's Anomaly Demonstration:</a:t>
-            </a:r>
-            <a:br/>
-            <a:r>
-              <a:t>  </a:t>
-            </a:r>
-            <a:r>
-              <a:rPr b="0" sz="1100">
-                <a:solidFill>
-                  <a:srgbClr val="94A3B8"/>
-                </a:solidFill>
-              </a:rPr>
-              <a:t>Using canonical reference string [1, 2, 3, 4, 1, 2, 5, 1, 2, 3, 4, 5]: FIFO page faults increase from 9 (3 frames) to 10 (4 frames) when given more memory!</a:t>
-            </a:r>
-          </a:p>
-          <a:p>
-            <a:pPr>
-              <a:spcAft>
-                <a:spcPts val="400"/>
-              </a:spcAft>
-              <a:defRPr b="1" sz="1150">
-                <a:solidFill>
-                  <a:srgbClr val="FFFFFF"/>
-                </a:solidFill>
-              </a:defRPr>
-            </a:pPr>
-            <a:r>
-              <a:t>• Stack Algorithm Contrast:</a:t>
-            </a:r>
-            <a:br/>
-            <a:r>
-              <a:t>  </a:t>
-            </a:r>
-            <a:r>
-              <a:rPr b="0" sz="1100">
-                <a:solidFill>
-                  <a:srgbClr val="94A3B8"/>
-                </a:solidFill>
-              </a:rPr>
-              <a:t>Proves that stack algorithms (LRU, Optimal) monotonically improve: the set of pages in m frames is always a strict subset of m+1 frames (M(m) ⊆ M(m+1)).</a:t>
-            </a:r>
-          </a:p>
-          <a:p>
-            <a:pPr>
-              <a:spcAft>
-                <a:spcPts val="400"/>
-              </a:spcAft>
-              <a:defRPr b="1" sz="1150">
-                <a:solidFill>
-                  <a:srgbClr val="FFFFFF"/>
-                </a:solidFill>
-              </a:defRPr>
-            </a:pPr>
-            <a:r>
-              <a:t>• Distributed Block Cache:</a:t>
-            </a:r>
-            <a:br/>
-            <a:r>
-              <a:t>  </a:t>
-            </a:r>
-            <a:r>
-              <a:rPr b="0" sz="1100">
-                <a:solidFill>
-                  <a:srgbClr val="94A3B8"/>
-                </a:solidFill>
-              </a:rPr>
-              <a:t>Nodes maintain in-memory block cache (LRU/FIFO) to accelerate repeated file block reads across cluster nodes.</a:t>
-            </a:r>
-          </a:p>
-          <a:p>
-            <a:pPr>
-              <a:spcAft>
-                <a:spcPts val="400"/>
-              </a:spcAft>
-              <a:defRPr b="1" sz="1150">
-                <a:solidFill>
-                  <a:srgbClr val="FFFFFF"/>
-                </a:solidFill>
-              </a:defRPr>
-            </a:pPr>
-            <a:r>
-              <a:t>• Telemetry Metrics:</a:t>
-            </a:r>
-            <a:br/>
-            <a:r>
-              <a:t>  </a:t>
-            </a:r>
-            <a:r>
-              <a:rPr b="0" sz="1100">
-                <a:solidFill>
-                  <a:srgbClr val="94A3B8"/>
-                </a:solidFill>
-              </a:rPr>
-              <a:t>Tracks Cache Hits, Misses, Hit Ratio %, Capacity, and cached block keys in real time.</a:t>
+              <a:t>KEY TAKEAWAY: Interactively proves Belady's Anomaly on FIFO and validates why LRU stack caching prevents thrashing.</a:t>
             </a:r>
           </a:p>
         </p:txBody>
@@ -7018,8 +5767,8 @@
         </p:nvSpPr>
         <p:spPr>
           <a:xfrm>
-            <a:off x="731520" y="365760"/>
-            <a:ext cx="10728655" cy="320040"/>
+            <a:off x="822960" y="365760"/>
+            <a:ext cx="10515600" cy="292608"/>
           </a:xfrm>
           <a:prstGeom prst="rect">
             <a:avLst/>
@@ -7033,14 +5782,14 @@
           <a:lstStyle/>
           <a:p>
             <a:pPr>
-              <a:defRPr sz="1000" b="1">
+              <a:defRPr sz="1100" b="1">
                 <a:solidFill>
                   <a:srgbClr val="38BDF8"/>
                 </a:solidFill>
               </a:defRPr>
             </a:pPr>
             <a:r>
-              <a:t>DISTRIBUTED SYNCHRONIZATION</a:t>
+              <a:t>MODULE 4: DISTRIBUTED SYNCHRONIZATION</a:t>
             </a:r>
           </a:p>
         </p:txBody>
@@ -7053,8 +5802,8 @@
         </p:nvSpPr>
         <p:spPr>
           <a:xfrm>
-            <a:off x="731520" y="685800"/>
-            <a:ext cx="10728655" cy="594360"/>
+            <a:off x="822960" y="658368"/>
+            <a:ext cx="10515600" cy="502920"/>
           </a:xfrm>
           <a:prstGeom prst="rect">
             <a:avLst/>
@@ -7075,7 +5824,7 @@
               </a:defRPr>
             </a:pPr>
             <a:r>
-              <a:t>6. Ricart-Agrawala Mutual Exclusion &amp; Distributed Leases</a:t>
+              <a:t>Ricart-Agrawala Mutual Exclusion &amp; Leases</a:t>
             </a:r>
           </a:p>
         </p:txBody>
@@ -7088,18 +5837,18 @@
         </p:nvSpPr>
         <p:spPr>
           <a:xfrm>
-            <a:off x="731520" y="1463040"/>
-            <a:ext cx="5120640" cy="4754880"/>
+            <a:off x="822960" y="1280160"/>
+            <a:ext cx="10545775" cy="4983480"/>
           </a:xfrm>
           <a:prstGeom prst="roundRect">
             <a:avLst/>
           </a:prstGeom>
           <a:solidFill>
-            <a:srgbClr val="162038"/>
+            <a:srgbClr val="141E34"/>
           </a:solidFill>
           <a:ln w="19050">
             <a:solidFill>
-              <a:srgbClr val="263554"/>
+              <a:srgbClr val="263758"/>
             </a:solidFill>
           </a:ln>
         </p:spPr>
@@ -7133,8 +5882,8 @@
         </p:nvSpPr>
         <p:spPr>
           <a:xfrm>
-            <a:off x="960120" y="1645920"/>
-            <a:ext cx="4663440" cy="411480"/>
+            <a:off x="1188720" y="1554480"/>
+            <a:ext cx="9814255" cy="365760"/>
           </a:xfrm>
           <a:prstGeom prst="rect">
             <a:avLst/>
@@ -7148,14 +5897,14 @@
           <a:lstStyle/>
           <a:p>
             <a:pPr>
-              <a:defRPr sz="1400" b="1">
+              <a:defRPr sz="1300" b="1">
                 <a:solidFill>
                   <a:srgbClr val="22C55E"/>
                 </a:solidFill>
               </a:defRPr>
             </a:pPr>
             <a:r>
-              <a:t>Ricart-Agrawala Mutual Exclusion over RPC</a:t>
+              <a:t>OSDS Concepts: Lamport Logical Clocks, Distributed Critical Section &amp; Fault-Tolerant Leases</a:t>
             </a:r>
           </a:p>
         </p:txBody>
@@ -7168,8 +5917,8 @@
         </p:nvSpPr>
         <p:spPr>
           <a:xfrm>
-            <a:off x="960120" y="2011680"/>
-            <a:ext cx="4663440" cy="3931920"/>
+            <a:off x="1188720" y="2057400"/>
+            <a:ext cx="9814255" cy="3977640"/>
           </a:xfrm>
           <a:prstGeom prst="rect">
             <a:avLst/>
@@ -7177,175 +5926,152 @@
           <a:noFill/>
         </p:spPr>
         <p:txBody>
-          <a:bodyPr wrap="square" lIns="0" tIns="0">
+          <a:bodyPr wrap="square" lIns="0" tIns="0" rIns="0" bIns="0">
             <a:spAutoFit/>
           </a:bodyPr>
           <a:lstStyle/>
           <a:p>
             <a:pPr>
+              <a:spcBef>
+                <a:spcPts val="200"/>
+              </a:spcBef>
               <a:spcAft>
-                <a:spcPts val="400"/>
+                <a:spcPts val="1400"/>
               </a:spcAft>
-              <a:defRPr b="1" sz="1150">
-                <a:solidFill>
-                  <a:srgbClr val="FFFFFF"/>
-                </a:solidFill>
-              </a:defRPr>
-            </a:pPr>
-            <a:r>
-              <a:t>• Decentralized Peer-to-Peer Protocol:</a:t>
-            </a:r>
-            <a:br/>
-            <a:r>
-              <a:t>  </a:t>
-            </a:r>
-            <a:r>
-              <a:rPr b="0" sz="1100">
-                <a:solidFill>
-                  <a:srgbClr val="94A3B8"/>
-                </a:solidFill>
-              </a:rPr>
-              <a:t>Eliminates single point of failure and bottleneck of centralized lock coordinators.</a:t>
-            </a:r>
-          </a:p>
-          <a:p>
-            <a:pPr>
+            </a:pPr>
+            <a:r>
+              <a:rPr b="1" sz="1600">
+                <a:solidFill>
+                  <a:srgbClr val="38BDF8"/>
+                </a:solidFill>
+              </a:rPr>
+              <a:t>•  The Concurrency Problem: </a:t>
+            </a:r>
+            <a:r>
+              <a:rPr b="0" sz="1600">
+                <a:solidFill>
+                  <a:srgbClr val="E2E8F0"/>
+                </a:solidFill>
+              </a:rPr>
+              <a:t>Multiple independent worker nodes must safely access shared hardware and critical sections without a centralized bottleneck or race conditions.</a:t>
+            </a:r>
+          </a:p>
+          <a:p>
+            <a:pPr>
+              <a:spcBef>
+                <a:spcPts val="200"/>
+              </a:spcBef>
               <a:spcAft>
-                <a:spcPts val="400"/>
+                <a:spcPts val="1400"/>
               </a:spcAft>
-              <a:defRPr b="1" sz="1150">
-                <a:solidFill>
-                  <a:srgbClr val="FFFFFF"/>
-                </a:solidFill>
-              </a:defRPr>
-            </a:pPr>
-            <a:r>
-              <a:t>• Message Complexity: Exactly 2(N-1):</a:t>
-            </a:r>
-            <a:br/>
-            <a:r>
-              <a:t>  </a:t>
-            </a:r>
-            <a:r>
-              <a:rPr b="0" sz="1100">
-                <a:solidFill>
-                  <a:srgbClr val="94A3B8"/>
-                </a:solidFill>
-              </a:rPr>
-              <a:t>Each entry requires (N-1) REQUESTs and (N-1) REPLYs. Outperforms Lamport's algorithm (3(N-1) messages).</a:t>
-            </a:r>
-          </a:p>
-          <a:p>
-            <a:pPr>
+            </a:pPr>
+            <a:r>
+              <a:rPr b="1" sz="1600">
+                <a:solidFill>
+                  <a:srgbClr val="38BDF8"/>
+                </a:solidFill>
+              </a:rPr>
+              <a:t>•  Ricart-Agrawala Algorithm: </a:t>
+            </a:r>
+            <a:r>
+              <a:rPr b="0" sz="1600">
+                <a:solidFill>
+                  <a:srgbClr val="E2E8F0"/>
+                </a:solidFill>
+              </a:rPr>
+              <a:t>Workers broadcast timestamped request messages to all peers; entry into the critical section is granted only when all peers acknowledge.</a:t>
+            </a:r>
+          </a:p>
+          <a:p>
+            <a:pPr>
+              <a:spcBef>
+                <a:spcPts val="200"/>
+              </a:spcBef>
               <a:spcAft>
-                <a:spcPts val="400"/>
+                <a:spcPts val="1400"/>
               </a:spcAft>
-              <a:defRPr b="1" sz="1150">
-                <a:solidFill>
-                  <a:srgbClr val="FFFFFF"/>
-                </a:solidFill>
-              </a:defRPr>
-            </a:pPr>
-            <a:r>
-              <a:t>• Lamport Logical Clocks Ordering:</a:t>
-            </a:r>
-            <a:br/>
-            <a:r>
-              <a:t>  </a:t>
-            </a:r>
-            <a:r>
-              <a:rPr b="0" sz="1100">
-                <a:solidFill>
-                  <a:srgbClr val="94A3B8"/>
-                </a:solidFill>
-              </a:rPr>
-              <a:t>Requests timestamped with Lamport clock T. Lower timestamp wins entry; conflicting nodes defer replies until releasing CS.</a:t>
-            </a:r>
-          </a:p>
-          <a:p>
-            <a:pPr>
+            </a:pPr>
+            <a:r>
+              <a:rPr b="1" sz="1600">
+                <a:solidFill>
+                  <a:srgbClr val="38BDF8"/>
+                </a:solidFill>
+              </a:rPr>
+              <a:t>•  Optimal Message Complexity: </a:t>
+            </a:r>
+            <a:r>
+              <a:rPr b="0" sz="1600">
+                <a:solidFill>
+                  <a:srgbClr val="E2E8F0"/>
+                </a:solidFill>
+              </a:rPr>
+              <a:t>Achieves distributed mutual exclusion with exactly 2(N - 1) network messages per critical section entry.</a:t>
+            </a:r>
+          </a:p>
+          <a:p>
+            <a:pPr>
+              <a:spcBef>
+                <a:spcPts val="200"/>
+              </a:spcBef>
               <a:spcAft>
-                <a:spcPts val="400"/>
+                <a:spcPts val="1400"/>
               </a:spcAft>
-              <a:defRPr b="1" sz="1150">
-                <a:solidFill>
-                  <a:srgbClr val="FFFFFF"/>
-                </a:solidFill>
-              </a:defRPr>
-            </a:pPr>
-            <a:r>
-              <a:t>• Live Cluster RPC Trace:</a:t>
-            </a:r>
-            <a:br/>
-            <a:r>
-              <a:t>  </a:t>
-            </a:r>
-            <a:r>
-              <a:rPr b="0" sz="1100">
-                <a:solidFill>
-                  <a:srgbClr val="94A3B8"/>
-                </a:solidFill>
-              </a:rPr>
-              <a:t>Executes real inter-node TCP-JSON RPC messages between worker workstations with deferred reply queueing.</a:t>
-            </a:r>
-          </a:p>
-        </p:txBody>
-      </p:sp>
-      <p:sp>
-        <p:nvSpPr>
-          <p:cNvPr id="8" name="Rounded Rectangle 7"/>
-          <p:cNvSpPr/>
-          <p:nvPr/>
-        </p:nvSpPr>
-        <p:spPr>
-          <a:xfrm>
-            <a:off x="6217920" y="1463040"/>
-            <a:ext cx="5242255" cy="4754880"/>
-          </a:xfrm>
-          <a:prstGeom prst="roundRect">
-            <a:avLst/>
-          </a:prstGeom>
-          <a:solidFill>
-            <a:srgbClr val="162038"/>
-          </a:solidFill>
-          <a:ln w="19050">
-            <a:solidFill>
-              <a:srgbClr val="263554"/>
-            </a:solidFill>
-          </a:ln>
-        </p:spPr>
-        <p:style>
-          <a:lnRef idx="1">
-            <a:schemeClr val="accent1"/>
-          </a:lnRef>
-          <a:fillRef idx="3">
-            <a:schemeClr val="accent1"/>
-          </a:fillRef>
-          <a:effectRef idx="2">
-            <a:schemeClr val="accent1"/>
-          </a:effectRef>
-          <a:fontRef idx="minor">
-            <a:schemeClr val="lt1"/>
-          </a:fontRef>
-        </p:style>
-        <p:txBody>
-          <a:bodyPr rtlCol="0" anchor="ctr"/>
-          <a:lstStyle/>
-          <a:p>
-            <a:pPr algn="ctr"/>
-          </a:p>
-        </p:txBody>
-      </p:sp>
-      <p:sp>
-        <p:nvSpPr>
-          <p:cNvPr id="9" name="TextBox 8"/>
+            </a:pPr>
+            <a:r>
+              <a:rPr b="1" sz="1600">
+                <a:solidFill>
+                  <a:srgbClr val="38BDF8"/>
+                </a:solidFill>
+              </a:rPr>
+              <a:t>•  Lamport Logical Timestamps: </a:t>
+            </a:r>
+            <a:r>
+              <a:rPr b="0" sz="1600">
+                <a:solidFill>
+                  <a:srgbClr val="E2E8F0"/>
+                </a:solidFill>
+              </a:rPr>
+              <a:t>Breaks concurrent access ties deterministically by comparing message timestamps and unique node identifiers.</a:t>
+            </a:r>
+          </a:p>
+          <a:p>
+            <a:pPr>
+              <a:spcBef>
+                <a:spcPts val="200"/>
+              </a:spcBef>
+              <a:spcAft>
+                <a:spcPts val="1400"/>
+              </a:spcAft>
+            </a:pPr>
+            <a:r>
+              <a:rPr b="1" sz="1600">
+                <a:solidFill>
+                  <a:srgbClr val="38BDF8"/>
+                </a:solidFill>
+              </a:rPr>
+              <a:t>•  Crash-Resilient Leases: </a:t>
+            </a:r>
+            <a:r>
+              <a:rPr b="0" sz="1600">
+                <a:solidFill>
+                  <a:srgbClr val="E2E8F0"/>
+                </a:solidFill>
+              </a:rPr>
+              <a:t>Protects against node failure during execution: if a node crashes inside the critical section, its time-bounded lease expires and releases the lock automatically.</a:t>
+            </a:r>
+          </a:p>
+        </p:txBody>
+      </p:sp>
+      <p:sp>
+        <p:nvSpPr>
+          <p:cNvPr id="8" name="TextBox 7"/>
           <p:cNvSpPr txBox="1"/>
           <p:nvPr/>
         </p:nvSpPr>
         <p:spPr>
           <a:xfrm>
-            <a:off x="6446520" y="1645920"/>
-            <a:ext cx="4785055" cy="411480"/>
+            <a:off x="1188720" y="5669280"/>
+            <a:ext cx="9814255" cy="365760"/>
           </a:xfrm>
           <a:prstGeom prst="rect">
             <a:avLst/>
@@ -7359,145 +6085,14 @@
           <a:lstStyle/>
           <a:p>
             <a:pPr>
-              <a:defRPr sz="1400" b="1">
-                <a:solidFill>
-                  <a:srgbClr val="38BDF8"/>
+              <a:defRPr sz="1200" b="1">
+                <a:solidFill>
+                  <a:srgbClr val="FBBF24"/>
                 </a:solidFill>
               </a:defRPr>
             </a:pPr>
             <a:r>
-              <a:t>Distributed Leases &amp; Classical Concurrency</a:t>
-            </a:r>
-          </a:p>
-        </p:txBody>
-      </p:sp>
-      <p:sp>
-        <p:nvSpPr>
-          <p:cNvPr id="10" name="TextBox 9"/>
-          <p:cNvSpPr txBox="1"/>
-          <p:nvPr/>
-        </p:nvSpPr>
-        <p:spPr>
-          <a:xfrm>
-            <a:off x="6446520" y="2011680"/>
-            <a:ext cx="4754880" cy="3931920"/>
-          </a:xfrm>
-          <a:prstGeom prst="rect">
-            <a:avLst/>
-          </a:prstGeom>
-          <a:noFill/>
-        </p:spPr>
-        <p:txBody>
-          <a:bodyPr wrap="square" lIns="0" tIns="0">
-            <a:spAutoFit/>
-          </a:bodyPr>
-          <a:lstStyle/>
-          <a:p>
-            <a:pPr>
-              <a:spcAft>
-                <a:spcPts val="400"/>
-              </a:spcAft>
-              <a:defRPr b="1" sz="1150">
-                <a:solidFill>
-                  <a:srgbClr val="FFFFFF"/>
-                </a:solidFill>
-              </a:defRPr>
-            </a:pPr>
-            <a:r>
-              <a:t>• Distributed Lock Manager (DLM):</a:t>
-            </a:r>
-            <a:br/>
-            <a:r>
-              <a:t>  </a:t>
-            </a:r>
-            <a:r>
-              <a:rPr b="0" sz="1100">
-                <a:solidFill>
-                  <a:srgbClr val="94A3B8"/>
-                </a:solidFill>
-              </a:rPr>
-              <a:t>Named resource leases (e.g. file:/report.txt) with lease expiration and automatic revocation upon node crash.</a:t>
-            </a:r>
-          </a:p>
-          <a:p>
-            <a:pPr>
-              <a:spcAft>
-                <a:spcPts val="400"/>
-              </a:spcAft>
-              <a:defRPr b="1" sz="1150">
-                <a:solidFill>
-                  <a:srgbClr val="FFFFFF"/>
-                </a:solidFill>
-              </a:defRPr>
-            </a:pPr>
-            <a:r>
-              <a:t>• Readers-Writers Starvation Demo:</a:t>
-            </a:r>
-            <a:br/>
-            <a:r>
-              <a:t>  </a:t>
-            </a:r>
-            <a:r>
-              <a:rPr b="0" sz="1100">
-                <a:solidFill>
-                  <a:srgbClr val="94A3B8"/>
-                </a:solidFill>
-              </a:rPr>
-              <a:t>Contrasts Courtois Reader-Preference (writer starvation under continuous reads) with Writer-Preference (fair progress).</a:t>
-            </a:r>
-          </a:p>
-          <a:p>
-            <a:pPr>
-              <a:spcAft>
-                <a:spcPts val="400"/>
-              </a:spcAft>
-              <a:defRPr b="1" sz="1150">
-                <a:solidFill>
-                  <a:srgbClr val="FFFFFF"/>
-                </a:solidFill>
-              </a:defRPr>
-            </a:pPr>
-            <a:r>
-              <a:t>• Dining Philosophers Problem:</a:t>
-            </a:r>
-            <a:br/>
-            <a:r>
-              <a:t>  </a:t>
-            </a:r>
-            <a:r>
-              <a:rPr b="0" sz="1100">
-                <a:solidFill>
-                  <a:srgbClr val="94A3B8"/>
-                </a:solidFill>
-              </a:rPr>
-              <a:t>Demonstrates naive circular wait deadlock vs Dijkstra's Resource Hierarchy total ordering (breaks circular wait).</a:t>
-            </a:r>
-          </a:p>
-          <a:p>
-            <a:pPr>
-              <a:spcAft>
-                <a:spcPts val="400"/>
-              </a:spcAft>
-              <a:defRPr b="1" sz="1150">
-                <a:solidFill>
-                  <a:srgbClr val="FFFFFF"/>
-                </a:solidFill>
-              </a:defRPr>
-            </a:pPr>
-            <a:r>
-              <a:t>• Mutex &amp; Storage Race Conditions:</a:t>
-            </a:r>
-            <a:br/>
-            <a:r>
-              <a:t>  </a:t>
-            </a:r>
-            <a:r>
-              <a:rPr b="0" sz="1100">
-                <a:solidFill>
-                  <a:srgbClr val="94A3B8"/>
-                </a:solidFill>
-              </a:rPr>
-              <a:t>Demonstrates lost updates under unsynchronized concurrent increments vs thread-safe mutex synchronization.</a:t>
+              <a:t>KEY TAKEAWAY: Guarantees distributed mutual exclusion using 2(N-1) messages with lease timeouts to prevent orphan locks.</a:t>
             </a:r>
           </a:p>
         </p:txBody>
@@ -7571,8 +6166,8 @@
         </p:nvSpPr>
         <p:spPr>
           <a:xfrm>
-            <a:off x="731520" y="365760"/>
-            <a:ext cx="10728655" cy="320040"/>
+            <a:off x="822960" y="365760"/>
+            <a:ext cx="10515600" cy="292608"/>
           </a:xfrm>
           <a:prstGeom prst="rect">
             <a:avLst/>
@@ -7586,14 +6181,14 @@
           <a:lstStyle/>
           <a:p>
             <a:pPr>
-              <a:defRPr sz="1000" b="1">
+              <a:defRPr sz="1100" b="1">
                 <a:solidFill>
                   <a:srgbClr val="38BDF8"/>
                 </a:solidFill>
               </a:defRPr>
             </a:pPr>
             <a:r>
-              <a:t>DISTRIBUTED STORAGE &amp; REPLICATION</a:t>
+              <a:t>MODULE 5: DISTRIBUTED STORAGE</a:t>
             </a:r>
           </a:p>
         </p:txBody>
@@ -7606,8 +6201,8 @@
         </p:nvSpPr>
         <p:spPr>
           <a:xfrm>
-            <a:off x="731520" y="685800"/>
-            <a:ext cx="10728655" cy="594360"/>
+            <a:off x="822960" y="658368"/>
+            <a:ext cx="10515600" cy="502920"/>
           </a:xfrm>
           <a:prstGeom prst="rect">
             <a:avLst/>
@@ -7628,7 +6223,7 @@
               </a:defRPr>
             </a:pPr>
             <a:r>
-              <a:t>7. Block Distributed File System &amp; Conflict Detection</a:t>
+              <a:t>Fault-Tolerant Block Distributed File System (DFS)</a:t>
             </a:r>
           </a:p>
         </p:txBody>
@@ -7641,18 +6236,18 @@
         </p:nvSpPr>
         <p:spPr>
           <a:xfrm>
-            <a:off x="731520" y="1463040"/>
-            <a:ext cx="5120640" cy="4754880"/>
+            <a:off x="822960" y="1280160"/>
+            <a:ext cx="10545775" cy="4983480"/>
           </a:xfrm>
           <a:prstGeom prst="roundRect">
             <a:avLst/>
           </a:prstGeom>
           <a:solidFill>
-            <a:srgbClr val="162038"/>
+            <a:srgbClr val="141E34"/>
           </a:solidFill>
           <a:ln w="19050">
             <a:solidFill>
-              <a:srgbClr val="263554"/>
+              <a:srgbClr val="263758"/>
             </a:solidFill>
           </a:ln>
         </p:spPr>
@@ -7686,8 +6281,8 @@
         </p:nvSpPr>
         <p:spPr>
           <a:xfrm>
-            <a:off x="960120" y="1645920"/>
-            <a:ext cx="4663440" cy="411480"/>
+            <a:off x="1188720" y="1554480"/>
+            <a:ext cx="9814255" cy="365760"/>
           </a:xfrm>
           <a:prstGeom prst="rect">
             <a:avLst/>
@@ -7701,14 +6296,14 @@
           <a:lstStyle/>
           <a:p>
             <a:pPr>
-              <a:defRPr sz="1400" b="1">
-                <a:solidFill>
-                  <a:srgbClr val="38BDF8"/>
+              <a:defRPr sz="1300" b="1">
+                <a:solidFill>
+                  <a:srgbClr val="22C55E"/>
                 </a:solidFill>
               </a:defRPr>
             </a:pPr>
             <a:r>
-              <a:t>Block Architecture &amp; Pipelined Replication</a:t>
+              <a:t>OSDS Concepts: Block Chunking, Pipeline Replication, SHA-256 Scrubbing &amp; Vector Clocks</a:t>
             </a:r>
           </a:p>
         </p:txBody>
@@ -7721,8 +6316,8 @@
         </p:nvSpPr>
         <p:spPr>
           <a:xfrm>
-            <a:off x="960120" y="2011680"/>
-            <a:ext cx="4663440" cy="3931920"/>
+            <a:off x="1188720" y="2057400"/>
+            <a:ext cx="9814255" cy="3977640"/>
           </a:xfrm>
           <a:prstGeom prst="rect">
             <a:avLst/>
@@ -7730,175 +6325,152 @@
           <a:noFill/>
         </p:spPr>
         <p:txBody>
-          <a:bodyPr wrap="square" lIns="0" tIns="0">
+          <a:bodyPr wrap="square" lIns="0" tIns="0" rIns="0" bIns="0">
             <a:spAutoFit/>
           </a:bodyPr>
           <a:lstStyle/>
           <a:p>
             <a:pPr>
+              <a:spcBef>
+                <a:spcPts val="200"/>
+              </a:spcBef>
               <a:spcAft>
-                <a:spcPts val="400"/>
+                <a:spcPts val="1400"/>
               </a:spcAft>
-              <a:defRPr b="1" sz="1150">
-                <a:solidFill>
-                  <a:srgbClr val="FFFFFF"/>
-                </a:solidFill>
-              </a:defRPr>
-            </a:pPr>
-            <a:r>
-              <a:t>• 64 KB Block Chunking:</a:t>
-            </a:r>
-            <a:br/>
-            <a:r>
-              <a:t>  </a:t>
-            </a:r>
-            <a:r>
-              <a:rPr b="0" sz="1100">
-                <a:solidFill>
-                  <a:srgbClr val="94A3B8"/>
-                </a:solidFill>
-              </a:rPr>
-              <a:t>Large files split into 64 KB content-addressed blocks for parallel multi-node storage and I/O efficiency.</a:t>
-            </a:r>
-          </a:p>
-          <a:p>
-            <a:pPr>
+            </a:pPr>
+            <a:r>
+              <a:rPr b="1" sz="1600">
+                <a:solidFill>
+                  <a:srgbClr val="38BDF8"/>
+                </a:solidFill>
+              </a:rPr>
+              <a:t>•  64 KB Block Chunking: </a:t>
+            </a:r>
+            <a:r>
+              <a:rPr b="0" sz="1600">
+                <a:solidFill>
+                  <a:srgbClr val="E2E8F0"/>
+                </a:solidFill>
+              </a:rPr>
+              <a:t>Files uploaded to NEXUS-OS are split into uniform 64 KB binary blocks and scattered across physical worker nodes to balance disk usage.</a:t>
+            </a:r>
+          </a:p>
+          <a:p>
+            <a:pPr>
+              <a:spcBef>
+                <a:spcPts val="200"/>
+              </a:spcBef>
               <a:spcAft>
-                <a:spcPts val="400"/>
+                <a:spcPts val="1400"/>
               </a:spcAft>
-              <a:defRPr b="1" sz="1150">
-                <a:solidFill>
-                  <a:srgbClr val="FFFFFF"/>
-                </a:solidFill>
-              </a:defRPr>
-            </a:pPr>
-            <a:r>
-              <a:t>• 2x Pipelined Replication (RF=2):</a:t>
-            </a:r>
-            <a:br/>
-            <a:r>
-              <a:t>  </a:t>
-            </a:r>
-            <a:r>
-              <a:rPr b="0" sz="1100">
-                <a:solidFill>
-                  <a:srgbClr val="94A3B8"/>
-                </a:solidFill>
-              </a:rPr>
-              <a:t>Blocks written across worker nodes in an ordered pipeline, ensuring zero data loss upon single-node failure.</a:t>
-            </a:r>
-          </a:p>
-          <a:p>
-            <a:pPr>
+            </a:pPr>
+            <a:r>
+              <a:rPr b="1" sz="1600">
+                <a:solidFill>
+                  <a:srgbClr val="38BDF8"/>
+                </a:solidFill>
+              </a:rPr>
+              <a:t>•  2x Pipeline Replication: </a:t>
+            </a:r>
+            <a:r>
+              <a:rPr b="0" sz="1600">
+                <a:solidFill>
+                  <a:srgbClr val="E2E8F0"/>
+                </a:solidFill>
+              </a:rPr>
+              <a:t>Every block is stored on a primary worker and replicated to a secondary worker, ensuring files remain fully readable even if any one node crashes.</a:t>
+            </a:r>
+          </a:p>
+          <a:p>
+            <a:pPr>
+              <a:spcBef>
+                <a:spcPts val="200"/>
+              </a:spcBef>
               <a:spcAft>
-                <a:spcPts val="400"/>
+                <a:spcPts val="1400"/>
               </a:spcAft>
-              <a:defRPr b="1" sz="1150">
-                <a:solidFill>
-                  <a:srgbClr val="FFFFFF"/>
-                </a:solidFill>
-              </a:defRPr>
-            </a:pPr>
-            <a:r>
-              <a:t>• SHA-256 Checksum Scrubbing:</a:t>
-            </a:r>
-            <a:br/>
-            <a:r>
-              <a:t>  </a:t>
-            </a:r>
-            <a:r>
-              <a:rPr b="0" sz="1100">
-                <a:solidFill>
-                  <a:srgbClr val="94A3B8"/>
-                </a:solidFill>
-              </a:rPr>
-              <a:t>Every block is hashed on write. Background scrubber verifies hashes across nodes to detect bit-rot or tampering.</a:t>
-            </a:r>
-          </a:p>
-          <a:p>
-            <a:pPr>
+            </a:pPr>
+            <a:r>
+              <a:rPr b="1" sz="1600">
+                <a:solidFill>
+                  <a:srgbClr val="38BDF8"/>
+                </a:solidFill>
+              </a:rPr>
+              <a:t>•  SHA-256 Data Scrubbing: </a:t>
+            </a:r>
+            <a:r>
+              <a:rPr b="0" sz="1600">
+                <a:solidFill>
+                  <a:srgbClr val="E2E8F0"/>
+                </a:solidFill>
+              </a:rPr>
+              <a:t>A background integrity scrubber continuously verifies cryptographic checksums to detect and repair silent disk corruption and bitrot.</a:t>
+            </a:r>
+          </a:p>
+          <a:p>
+            <a:pPr>
+              <a:spcBef>
+                <a:spcPts val="200"/>
+              </a:spcBef>
               <a:spcAft>
-                <a:spcPts val="400"/>
+                <a:spcPts val="1400"/>
               </a:spcAft>
-              <a:defRPr b="1" sz="1150">
-                <a:solidFill>
-                  <a:srgbClr val="FFFFFF"/>
-                </a:solidFill>
-              </a:defRPr>
-            </a:pPr>
-            <a:r>
-              <a:t>• Self-Healing Re-replication:</a:t>
-            </a:r>
-            <a:br/>
-            <a:r>
-              <a:t>  </a:t>
-            </a:r>
-            <a:r>
-              <a:rPr b="0" sz="1100">
-                <a:solidFill>
-                  <a:srgbClr val="94A3B8"/>
-                </a:solidFill>
-              </a:rPr>
-              <a:t>Corrupt or missing replicas are automatically rebuilt from healthy surviving copies without manual intervention.</a:t>
-            </a:r>
-          </a:p>
-        </p:txBody>
-      </p:sp>
-      <p:sp>
-        <p:nvSpPr>
-          <p:cNvPr id="8" name="Rounded Rectangle 7"/>
-          <p:cNvSpPr/>
-          <p:nvPr/>
-        </p:nvSpPr>
-        <p:spPr>
-          <a:xfrm>
-            <a:off x="6217920" y="1463040"/>
-            <a:ext cx="5242255" cy="4754880"/>
-          </a:xfrm>
-          <a:prstGeom prst="roundRect">
-            <a:avLst/>
-          </a:prstGeom>
-          <a:solidFill>
-            <a:srgbClr val="162038"/>
-          </a:solidFill>
-          <a:ln w="19050">
-            <a:solidFill>
-              <a:srgbClr val="263554"/>
-            </a:solidFill>
-          </a:ln>
-        </p:spPr>
-        <p:style>
-          <a:lnRef idx="1">
-            <a:schemeClr val="accent1"/>
-          </a:lnRef>
-          <a:fillRef idx="3">
-            <a:schemeClr val="accent1"/>
-          </a:fillRef>
-          <a:effectRef idx="2">
-            <a:schemeClr val="accent1"/>
-          </a:effectRef>
-          <a:fontRef idx="minor">
-            <a:schemeClr val="lt1"/>
-          </a:fontRef>
-        </p:style>
-        <p:txBody>
-          <a:bodyPr rtlCol="0" anchor="ctr"/>
-          <a:lstStyle/>
-          <a:p>
-            <a:pPr algn="ctr"/>
-          </a:p>
-        </p:txBody>
-      </p:sp>
-      <p:sp>
-        <p:nvSpPr>
-          <p:cNvPr id="9" name="TextBox 8"/>
+            </a:pPr>
+            <a:r>
+              <a:rPr b="1" sz="1600">
+                <a:solidFill>
+                  <a:srgbClr val="38BDF8"/>
+                </a:solidFill>
+              </a:rPr>
+              <a:t>•  Vector Clocks for Concurrency: </a:t>
+            </a:r>
+            <a:r>
+              <a:rPr b="0" sz="1600">
+                <a:solidFill>
+                  <a:srgbClr val="E2E8F0"/>
+                </a:solidFill>
+              </a:rPr>
+              <a:t>Each file block maintains a vector timestamp across nodes to identify and flag conflicting simultaneous writes without data loss.</a:t>
+            </a:r>
+          </a:p>
+          <a:p>
+            <a:pPr>
+              <a:spcBef>
+                <a:spcPts val="200"/>
+              </a:spcBef>
+              <a:spcAft>
+                <a:spcPts val="1400"/>
+              </a:spcAft>
+            </a:pPr>
+            <a:r>
+              <a:rPr b="1" sz="1600">
+                <a:solidFill>
+                  <a:srgbClr val="38BDF8"/>
+                </a:solidFill>
+              </a:rPr>
+              <a:t>•  High Availability: </a:t>
+            </a:r>
+            <a:r>
+              <a:rPr b="0" sz="1600">
+                <a:solidFill>
+                  <a:srgbClr val="E2E8F0"/>
+                </a:solidFill>
+              </a:rPr>
+              <a:t>Files can be uploaded, listed, and reconstructed seamlessly through the dashboard with zero single-point-of-failure in the storage layer.</a:t>
+            </a:r>
+          </a:p>
+        </p:txBody>
+      </p:sp>
+      <p:sp>
+        <p:nvSpPr>
+          <p:cNvPr id="8" name="TextBox 7"/>
           <p:cNvSpPr txBox="1"/>
           <p:nvPr/>
         </p:nvSpPr>
         <p:spPr>
           <a:xfrm>
-            <a:off x="6446520" y="1645920"/>
-            <a:ext cx="4785055" cy="411480"/>
+            <a:off x="1188720" y="5669280"/>
+            <a:ext cx="9814255" cy="365760"/>
           </a:xfrm>
           <a:prstGeom prst="rect">
             <a:avLst/>
@@ -7912,145 +6484,14 @@
           <a:lstStyle/>
           <a:p>
             <a:pPr>
-              <a:defRPr sz="1400" b="1">
+              <a:defRPr sz="1200" b="1">
                 <a:solidFill>
                   <a:srgbClr val="FBBF24"/>
                 </a:solidFill>
               </a:defRPr>
             </a:pPr>
             <a:r>
-              <a:t>Collaborative Sync &amp; Vector Clocks</a:t>
-            </a:r>
-          </a:p>
-        </p:txBody>
-      </p:sp>
-      <p:sp>
-        <p:nvSpPr>
-          <p:cNvPr id="10" name="TextBox 9"/>
-          <p:cNvSpPr txBox="1"/>
-          <p:nvPr/>
-        </p:nvSpPr>
-        <p:spPr>
-          <a:xfrm>
-            <a:off x="6446520" y="2011680"/>
-            <a:ext cx="4754880" cy="3931920"/>
-          </a:xfrm>
-          <a:prstGeom prst="rect">
-            <a:avLst/>
-          </a:prstGeom>
-          <a:noFill/>
-        </p:spPr>
-        <p:txBody>
-          <a:bodyPr wrap="square" lIns="0" tIns="0">
-            <a:spAutoFit/>
-          </a:bodyPr>
-          <a:lstStyle/>
-          <a:p>
-            <a:pPr>
-              <a:spcAft>
-                <a:spcPts val="400"/>
-              </a:spcAft>
-              <a:defRPr b="1" sz="1150">
-                <a:solidFill>
-                  <a:srgbClr val="FFFFFF"/>
-                </a:solidFill>
-              </a:defRPr>
-            </a:pPr>
-            <a:r>
-              <a:t>• Optimistic Concurrency Control:</a:t>
-            </a:r>
-            <a:br/>
-            <a:r>
-              <a:t>  </a:t>
-            </a:r>
-            <a:r>
-              <a:rPr b="0" sz="1100">
-                <a:solidFill>
-                  <a:srgbClr val="94A3B8"/>
-                </a:solidFill>
-              </a:rPr>
-              <a:t>Saving from an older file version is rejected as CONFLICT to prevent silent overwrite of teammate edits.</a:t>
-            </a:r>
-          </a:p>
-          <a:p>
-            <a:pPr>
-              <a:spcAft>
-                <a:spcPts val="400"/>
-              </a:spcAft>
-              <a:defRPr b="1" sz="1150">
-                <a:solidFill>
-                  <a:srgbClr val="FFFFFF"/>
-                </a:solidFill>
-              </a:defRPr>
-            </a:pPr>
-            <a:r>
-              <a:t>• Fidge-Mattern Vector Clocks:</a:t>
-            </a:r>
-            <a:br/>
-            <a:r>
-              <a:t>  </a:t>
-            </a:r>
-            <a:r>
-              <a:rPr b="0" sz="1100">
-                <a:solidFill>
-                  <a:srgbClr val="94A3B8"/>
-                </a:solidFill>
-              </a:rPr>
-              <a:t>Events stamped with vector clocks (VC) tracking causal history across nodes and distinguishing concurrent edits (A || B).</a:t>
-            </a:r>
-          </a:p>
-          <a:p>
-            <a:pPr>
-              <a:spcAft>
-                <a:spcPts val="400"/>
-              </a:spcAft>
-              <a:defRPr b="1" sz="1150">
-                <a:solidFill>
-                  <a:srgbClr val="FFFFFF"/>
-                </a:solidFill>
-              </a:defRPr>
-            </a:pPr>
-            <a:r>
-              <a:t>• Dropbox-Style Conflict Copies:</a:t>
-            </a:r>
-            <a:br/>
-            <a:r>
-              <a:t>  </a:t>
-            </a:r>
-            <a:r>
-              <a:rPr b="0" sz="1100">
-                <a:solidFill>
-                  <a:srgbClr val="94A3B8"/>
-                </a:solidFill>
-              </a:rPr>
-              <a:t>When concurrent offline edits collide, both copies are preserved (e.g. `report (conflict node-2 T=14).txt`) with zero data loss.</a:t>
-            </a:r>
-          </a:p>
-          <a:p>
-            <a:pPr>
-              <a:spcAft>
-                <a:spcPts val="400"/>
-              </a:spcAft>
-              <a:defRPr b="1" sz="1150">
-                <a:solidFill>
-                  <a:srgbClr val="FFFFFF"/>
-                </a:solidFill>
-              </a:defRPr>
-            </a:pPr>
-            <a:r>
-              <a:t>• Rsync Delta Transfers:</a:t>
-            </a:r>
-            <a:br/>
-            <a:r>
-              <a:t>  </a:t>
-            </a:r>
-            <a:r>
-              <a:rPr b="0" sz="1100">
-                <a:solidFill>
-                  <a:srgbClr val="94A3B8"/>
-                </a:solidFill>
-              </a:rPr>
-              <a:t>Only modified 64 KB block chunks are transferred over the network, achieving 50%+ bandwidth savings vs full file copies.</a:t>
+              <a:t>KEY TAKEAWAY: Implements block chunking and 2x replication so student files survive individual disk and node failures.</a:t>
             </a:r>
           </a:p>
         </p:txBody>
@@ -8124,8 +6565,8 @@
         </p:nvSpPr>
         <p:spPr>
           <a:xfrm>
-            <a:off x="731520" y="365760"/>
-            <a:ext cx="10728655" cy="320040"/>
+            <a:off x="822960" y="365760"/>
+            <a:ext cx="10515600" cy="292608"/>
           </a:xfrm>
           <a:prstGeom prst="rect">
             <a:avLst/>
@@ -8139,14 +6580,14 @@
           <a:lstStyle/>
           <a:p>
             <a:pPr>
-              <a:defRPr sz="1000" b="1">
+              <a:defRPr sz="1100" b="1">
                 <a:solidFill>
                   <a:srgbClr val="38BDF8"/>
                 </a:solidFill>
               </a:defRPr>
             </a:pPr>
             <a:r>
-              <a:t>FAULT TOLERANCE &amp; COMMUNICATION</a:t>
+              <a:t>MODULE 6: FAULT TOLERANCE &amp; NETWORKING</a:t>
             </a:r>
           </a:p>
         </p:txBody>
@@ -8159,8 +6600,8 @@
         </p:nvSpPr>
         <p:spPr>
           <a:xfrm>
-            <a:off x="731520" y="685800"/>
-            <a:ext cx="10728655" cy="594360"/>
+            <a:off x="822960" y="658368"/>
+            <a:ext cx="10515600" cy="502920"/>
           </a:xfrm>
           <a:prstGeom prst="rect">
             <a:avLst/>
@@ -8181,7 +6622,7 @@
               </a:defRPr>
             </a:pPr>
             <a:r>
-              <a:t>8. Node Failure &amp; Recovery + IPC &amp; RPC Micro-Benchmarks</a:t>
+              <a:t>Node Crash Recovery &amp; IPC Micro-Benchmarks</a:t>
             </a:r>
           </a:p>
         </p:txBody>
@@ -8194,18 +6635,18 @@
         </p:nvSpPr>
         <p:spPr>
           <a:xfrm>
-            <a:off x="731520" y="1463040"/>
-            <a:ext cx="5120640" cy="4754880"/>
+            <a:off x="822960" y="1280160"/>
+            <a:ext cx="10545775" cy="4983480"/>
           </a:xfrm>
           <a:prstGeom prst="roundRect">
             <a:avLst/>
           </a:prstGeom>
           <a:solidFill>
-            <a:srgbClr val="162038"/>
+            <a:srgbClr val="141E34"/>
           </a:solidFill>
           <a:ln w="19050">
             <a:solidFill>
-              <a:srgbClr val="263554"/>
+              <a:srgbClr val="263758"/>
             </a:solidFill>
           </a:ln>
         </p:spPr>
@@ -8239,8 +6680,8 @@
         </p:nvSpPr>
         <p:spPr>
           <a:xfrm>
-            <a:off x="960120" y="1645920"/>
-            <a:ext cx="4663440" cy="411480"/>
+            <a:off x="1188720" y="1554480"/>
+            <a:ext cx="9814255" cy="365760"/>
           </a:xfrm>
           <a:prstGeom prst="rect">
             <a:avLst/>
@@ -8254,14 +6695,14 @@
           <a:lstStyle/>
           <a:p>
             <a:pPr>
-              <a:defRPr sz="1400" b="1">
+              <a:defRPr sz="1300" b="1">
                 <a:solidFill>
                   <a:srgbClr val="22C55E"/>
                 </a:solidFill>
               </a:defRPr>
             </a:pPr>
             <a:r>
-              <a:t>Worker Node Fault Tolerance &amp; Recovery</a:t>
+              <a:t>OSDS Concepts: Heartbeat Failure Detectors, Dynamic Task Migration &amp; Kernel IPC vs Shared Memory</a:t>
             </a:r>
           </a:p>
         </p:txBody>
@@ -8274,8 +6715,8 @@
         </p:nvSpPr>
         <p:spPr>
           <a:xfrm>
-            <a:off x="960120" y="2011680"/>
-            <a:ext cx="4663440" cy="3931920"/>
+            <a:off x="1188720" y="2057400"/>
+            <a:ext cx="9814255" cy="3977640"/>
           </a:xfrm>
           <a:prstGeom prst="rect">
             <a:avLst/>
@@ -8283,175 +6724,152 @@
           <a:noFill/>
         </p:spPr>
         <p:txBody>
-          <a:bodyPr wrap="square" lIns="0" tIns="0">
+          <a:bodyPr wrap="square" lIns="0" tIns="0" rIns="0" bIns="0">
             <a:spAutoFit/>
           </a:bodyPr>
           <a:lstStyle/>
           <a:p>
             <a:pPr>
+              <a:spcBef>
+                <a:spcPts val="200"/>
+              </a:spcBef>
               <a:spcAft>
-                <a:spcPts val="400"/>
+                <a:spcPts val="1400"/>
               </a:spcAft>
-              <a:defRPr b="1" sz="1150">
-                <a:solidFill>
-                  <a:srgbClr val="FFFFFF"/>
-                </a:solidFill>
-              </a:defRPr>
-            </a:pPr>
-            <a:r>
-              <a:t>• 3-State Failure Detector:</a:t>
-            </a:r>
-            <a:br/>
-            <a:r>
-              <a:t>  </a:t>
-            </a:r>
-            <a:r>
-              <a:rPr b="0" sz="1100">
-                <a:solidFill>
-                  <a:srgbClr val="94A3B8"/>
-                </a:solidFill>
-              </a:rPr>
-              <a:t>Heartbeat period: 2.0s. Missed &gt;4.0s → SUSPECT. Missed &gt;6.0s → OFFLINE eviction.</a:t>
-            </a:r>
-          </a:p>
-          <a:p>
-            <a:pPr>
+            </a:pPr>
+            <a:r>
+              <a:rPr b="1" sz="1600">
+                <a:solidFill>
+                  <a:srgbClr val="38BDF8"/>
+                </a:solidFill>
+              </a:rPr>
+              <a:t>•  3-State Failure Detector: </a:t>
+            </a:r>
+            <a:r>
+              <a:rPr b="0" sz="1600">
+                <a:solidFill>
+                  <a:srgbClr val="E2E8F0"/>
+                </a:solidFill>
+              </a:rPr>
+              <a:t>The Coordinator continuously tracks worker node health across states: ONLINE -&gt; SUSPECT -&gt; OFFLINE based on missed heartbeats.</a:t>
+            </a:r>
+          </a:p>
+          <a:p>
+            <a:pPr>
+              <a:spcBef>
+                <a:spcPts val="200"/>
+              </a:spcBef>
               <a:spcAft>
-                <a:spcPts val="400"/>
+                <a:spcPts val="1400"/>
               </a:spcAft>
-              <a:defRPr b="1" sz="1150">
-                <a:solidFill>
-                  <a:srgbClr val="FFFFFF"/>
-                </a:solidFill>
-              </a:defRPr>
-            </a:pPr>
-            <a:r>
-              <a:t>• Automated Task Migration:</a:t>
-            </a:r>
-            <a:br/>
-            <a:r>
-              <a:t>  </a:t>
-            </a:r>
-            <a:r>
-              <a:rPr b="0" sz="1100">
-                <a:solidFill>
-                  <a:srgbClr val="94A3B8"/>
-                </a:solidFill>
-              </a:rPr>
-              <a:t>When node-2 crashes, the Coordinator reschedules its active/waiting tasks to surviving nodes (node-1 or node-3).</a:t>
-            </a:r>
-          </a:p>
-          <a:p>
-            <a:pPr>
+            </a:pPr>
+            <a:r>
+              <a:rPr b="1" sz="1600">
+                <a:solidFill>
+                  <a:srgbClr val="38BDF8"/>
+                </a:solidFill>
+              </a:rPr>
+              <a:t>•  Automated Task Migration: </a:t>
+            </a:r>
+            <a:r>
+              <a:rPr b="0" sz="1600">
+                <a:solidFill>
+                  <a:srgbClr val="E2E8F0"/>
+                </a:solidFill>
+              </a:rPr>
+              <a:t>When a worker failure is detected, the Coordinator stops routing jobs to it and migrates all in-flight tasks to surviving healthy nodes.</a:t>
+            </a:r>
+          </a:p>
+          <a:p>
+            <a:pPr>
+              <a:spcBef>
+                <a:spcPts val="200"/>
+              </a:spcBef>
               <a:spcAft>
-                <a:spcPts val="400"/>
+                <a:spcPts val="1400"/>
               </a:spcAft>
-              <a:defRPr b="1" sz="1150">
-                <a:solidFill>
-                  <a:srgbClr val="FFFFFF"/>
-                </a:solidFill>
-              </a:defRPr>
-            </a:pPr>
-            <a:r>
-              <a:t>• Live Status Synchronization:</a:t>
-            </a:r>
-            <a:br/>
-            <a:r>
-              <a:t>  </a:t>
-            </a:r>
-            <a:r>
-              <a:rPr b="0" sz="1100">
-                <a:solidFill>
-                  <a:srgbClr val="94A3B8"/>
-                </a:solidFill>
-              </a:rPr>
-              <a:t>Simulating failure updates Online Nodes from 3/3 → 2/3 immediately on System Overview and Node Monitor.</a:t>
-            </a:r>
-          </a:p>
-          <a:p>
-            <a:pPr>
+            </a:pPr>
+            <a:r>
+              <a:rPr b="1" sz="1600">
+                <a:solidFill>
+                  <a:srgbClr val="38BDF8"/>
+                </a:solidFill>
+              </a:rPr>
+              <a:t>•  Live Node Recovery: </a:t>
+            </a:r>
+            <a:r>
+              <a:rPr b="0" sz="1600">
+                <a:solidFill>
+                  <a:srgbClr val="E2E8F0"/>
+                </a:solidFill>
+              </a:rPr>
+              <a:t>When an offline worker reconnects, the system resynchronizes state, marks the node healthy (3/3 Online), and redistributes the cluster workload.</a:t>
+            </a:r>
+          </a:p>
+          <a:p>
+            <a:pPr>
+              <a:spcBef>
+                <a:spcPts val="200"/>
+              </a:spcBef>
               <a:spcAft>
-                <a:spcPts val="400"/>
+                <a:spcPts val="1400"/>
               </a:spcAft>
-              <a:defRPr b="1" sz="1150">
-                <a:solidFill>
-                  <a:srgbClr val="FFFFFF"/>
-                </a:solidFill>
-              </a:defRPr>
-            </a:pPr>
-            <a:r>
-              <a:t>• Seamless Node Healing:</a:t>
-            </a:r>
-            <a:br/>
-            <a:r>
-              <a:t>  </a:t>
-            </a:r>
-            <a:r>
-              <a:rPr b="0" sz="1100">
-                <a:solidFill>
-                  <a:srgbClr val="94A3B8"/>
-                </a:solidFill>
-              </a:rPr>
-              <a:t>Reconnected node re-registers; status returns to 3/3 ONLINE; cluster resource capacity vector is restored.</a:t>
-            </a:r>
-          </a:p>
-        </p:txBody>
-      </p:sp>
-      <p:sp>
-        <p:nvSpPr>
-          <p:cNvPr id="8" name="Rounded Rectangle 7"/>
-          <p:cNvSpPr/>
-          <p:nvPr/>
-        </p:nvSpPr>
-        <p:spPr>
-          <a:xfrm>
-            <a:off x="6217920" y="1463040"/>
-            <a:ext cx="5242255" cy="4754880"/>
-          </a:xfrm>
-          <a:prstGeom prst="roundRect">
-            <a:avLst/>
-          </a:prstGeom>
-          <a:solidFill>
-            <a:srgbClr val="162038"/>
-          </a:solidFill>
-          <a:ln w="19050">
-            <a:solidFill>
-              <a:srgbClr val="263554"/>
-            </a:solidFill>
-          </a:ln>
-        </p:spPr>
-        <p:style>
-          <a:lnRef idx="1">
-            <a:schemeClr val="accent1"/>
-          </a:lnRef>
-          <a:fillRef idx="3">
-            <a:schemeClr val="accent1"/>
-          </a:fillRef>
-          <a:effectRef idx="2">
-            <a:schemeClr val="accent1"/>
-          </a:effectRef>
-          <a:fontRef idx="minor">
-            <a:schemeClr val="lt1"/>
-          </a:fontRef>
-        </p:style>
-        <p:txBody>
-          <a:bodyPr rtlCol="0" anchor="ctr"/>
-          <a:lstStyle/>
-          <a:p>
-            <a:pPr algn="ctr"/>
-          </a:p>
-        </p:txBody>
-      </p:sp>
-      <p:sp>
-        <p:nvSpPr>
-          <p:cNvPr id="9" name="TextBox 8"/>
+            </a:pPr>
+            <a:r>
+              <a:rPr b="1" sz="1600">
+                <a:solidFill>
+                  <a:srgbClr val="38BDF8"/>
+                </a:solidFill>
+              </a:rPr>
+              <a:t>•  Sockets vs Shared Memory: </a:t>
+            </a:r>
+            <a:r>
+              <a:rPr b="0" sz="1600">
+                <a:solidFill>
+                  <a:srgbClr val="E2E8F0"/>
+                </a:solidFill>
+              </a:rPr>
+              <a:t>Benchmarks demonstrate that POSIX Shared Memory achieves lower latency by avoiding kernel buffer copies and context switches required by TCP Sockets.</a:t>
+            </a:r>
+          </a:p>
+          <a:p>
+            <a:pPr>
+              <a:spcBef>
+                <a:spcPts val="200"/>
+              </a:spcBef>
+              <a:spcAft>
+                <a:spcPts val="1400"/>
+              </a:spcAft>
+            </a:pPr>
+            <a:r>
+              <a:rPr b="1" sz="1600">
+                <a:solidFill>
+                  <a:srgbClr val="38BDF8"/>
+                </a:solidFill>
+              </a:rPr>
+              <a:t>•  TCP-JSON vs gRPC HTTP/2: </a:t>
+            </a:r>
+            <a:r>
+              <a:rPr b="0" sz="1600">
+                <a:solidFill>
+                  <a:srgbClr val="E2E8F0"/>
+                </a:solidFill>
+              </a:rPr>
+              <a:t>Evaluates serialization overhead: binary Protocol Buffers over multiplexed HTTP/2 deliver superior throughput compared to text JSON streams.</a:t>
+            </a:r>
+          </a:p>
+        </p:txBody>
+      </p:sp>
+      <p:sp>
+        <p:nvSpPr>
+          <p:cNvPr id="8" name="TextBox 7"/>
           <p:cNvSpPr txBox="1"/>
           <p:nvPr/>
         </p:nvSpPr>
         <p:spPr>
           <a:xfrm>
-            <a:off x="6446520" y="1645920"/>
-            <a:ext cx="4785055" cy="411480"/>
+            <a:off x="1188720" y="5669280"/>
+            <a:ext cx="9814255" cy="365760"/>
           </a:xfrm>
           <a:prstGeom prst="rect">
             <a:avLst/>
@@ -8465,145 +6883,14 @@
           <a:lstStyle/>
           <a:p>
             <a:pPr>
-              <a:defRPr sz="1400" b="1">
-                <a:solidFill>
-                  <a:srgbClr val="38BDF8"/>
+              <a:defRPr sz="1200" b="1">
+                <a:solidFill>
+                  <a:srgbClr val="FBBF24"/>
                 </a:solidFill>
               </a:defRPr>
             </a:pPr>
             <a:r>
-              <a:t>IPC &amp; RPC Micro-Benchmarks</a:t>
-            </a:r>
-          </a:p>
-        </p:txBody>
-      </p:sp>
-      <p:sp>
-        <p:nvSpPr>
-          <p:cNvPr id="10" name="TextBox 9"/>
-          <p:cNvSpPr txBox="1"/>
-          <p:nvPr/>
-        </p:nvSpPr>
-        <p:spPr>
-          <a:xfrm>
-            <a:off x="6446520" y="2011680"/>
-            <a:ext cx="4754880" cy="3931920"/>
-          </a:xfrm>
-          <a:prstGeom prst="rect">
-            <a:avLst/>
-          </a:prstGeom>
-          <a:noFill/>
-        </p:spPr>
-        <p:txBody>
-          <a:bodyPr wrap="square" lIns="0" tIns="0">
-            <a:spAutoFit/>
-          </a:bodyPr>
-          <a:lstStyle/>
-          <a:p>
-            <a:pPr>
-              <a:spcAft>
-                <a:spcPts val="400"/>
-              </a:spcAft>
-              <a:defRPr b="1" sz="1150">
-                <a:solidFill>
-                  <a:srgbClr val="FFFFFF"/>
-                </a:solidFill>
-              </a:defRPr>
-            </a:pPr>
-            <a:r>
-              <a:t>• IPC: Sockets vs Shared Memory:</a:t>
-            </a:r>
-            <a:br/>
-            <a:r>
-              <a:t>  </a:t>
-            </a:r>
-            <a:r>
-              <a:rPr b="0" sz="1100">
-                <a:solidFill>
-                  <a:srgbClr val="94A3B8"/>
-                </a:solidFill>
-              </a:rPr>
-              <a:t>Loopback TCP Sockets require user-to-kernel buffer copies. Zero-copy POSIX Shared Memory maps physical RAM directly, achieving 5.5x lower latency and multi-GB/s throughput.</a:t>
-            </a:r>
-          </a:p>
-          <a:p>
-            <a:pPr>
-              <a:spcAft>
-                <a:spcPts val="400"/>
-              </a:spcAft>
-              <a:defRPr b="1" sz="1150">
-                <a:solidFill>
-                  <a:srgbClr val="FFFFFF"/>
-                </a:solidFill>
-              </a:defRPr>
-            </a:pPr>
-            <a:r>
-              <a:t>• RPC: TCP-JSON vs gRPC HTTP/2:</a:t>
-            </a:r>
-            <a:br/>
-            <a:r>
-              <a:t>  </a:t>
-            </a:r>
-            <a:r>
-              <a:rPr b="0" sz="1100">
-                <a:solidFill>
-                  <a:srgbClr val="94A3B8"/>
-                </a:solidFill>
-              </a:rPr>
-              <a:t>Compares text JSON over stream sockets with binary Protocol Buffers over multiplexed HTTP/2. gRPC achieves 2.4x higher throughput and lower serialization overhead.</a:t>
-            </a:r>
-          </a:p>
-          <a:p>
-            <a:pPr>
-              <a:spcAft>
-                <a:spcPts val="400"/>
-              </a:spcAft>
-              <a:defRPr b="1" sz="1150">
-                <a:solidFill>
-                  <a:srgbClr val="FFFFFF"/>
-                </a:solidFill>
-              </a:defRPr>
-            </a:pPr>
-            <a:r>
-              <a:t>• Linux Cgroup Memory Isolation:</a:t>
-            </a:r>
-            <a:br/>
-            <a:r>
-              <a:t>  </a:t>
-            </a:r>
-            <a:r>
-              <a:rPr b="0" sz="1100">
-                <a:solidFill>
-                  <a:srgbClr val="94A3B8"/>
-                </a:solidFill>
-              </a:rPr>
-              <a:t>Aggressive memory leakers are intercepted and terminated by OOM killer (exit 137) without crashing sibling cluster nodes.</a:t>
-            </a:r>
-          </a:p>
-          <a:p>
-            <a:pPr>
-              <a:spcAft>
-                <a:spcPts val="400"/>
-              </a:spcAft>
-              <a:defRPr b="1" sz="1150">
-                <a:solidFill>
-                  <a:srgbClr val="FFFFFF"/>
-                </a:solidFill>
-              </a:defRPr>
-            </a:pPr>
-            <a:r>
-              <a:t>• Dual-Clock Telemetry:</a:t>
-            </a:r>
-            <a:br/>
-            <a:r>
-              <a:t>  </a:t>
-            </a:r>
-            <a:r>
-              <a:rPr b="0" sz="1100">
-                <a:solidFill>
-                  <a:srgbClr val="94A3B8"/>
-                </a:solidFill>
-              </a:rPr>
-              <a:t>Every RPC message and log entry is tagged with Lamport logical time (T) and Fidge-Mattern Vector Clock (VC).</a:t>
+              <a:t>KEY TAKEAWAY: Demonstrates live node crash handling with task migration, verified by IPC latency benchmarks.</a:t>
             </a:r>
           </a:p>
         </p:txBody>
